--- a/Method.pptx
+++ b/Method.pptx
@@ -5,13 +5,13 @@
     <p:sldMasterId id="2147483648" r:id="rId1"/>
   </p:sldMasterIdLst>
   <p:notesMasterIdLst>
-    <p:notesMasterId r:id="rId17"/>
+    <p:notesMasterId r:id="rId20"/>
   </p:notesMasterIdLst>
   <p:sldIdLst>
     <p:sldId id="256" r:id="rId2"/>
-    <p:sldId id="257" r:id="rId3"/>
+    <p:sldId id="273" r:id="rId3"/>
     <p:sldId id="258" r:id="rId4"/>
-    <p:sldId id="259" r:id="rId5"/>
+    <p:sldId id="274" r:id="rId5"/>
     <p:sldId id="264" r:id="rId6"/>
     <p:sldId id="265" r:id="rId7"/>
     <p:sldId id="266" r:id="rId8"/>
@@ -19,43 +19,42 @@
     <p:sldId id="268" r:id="rId10"/>
     <p:sldId id="269" r:id="rId11"/>
     <p:sldId id="270" r:id="rId12"/>
-    <p:sldId id="272" r:id="rId13"/>
+    <p:sldId id="271" r:id="rId13"/>
     <p:sldId id="260" r:id="rId14"/>
-    <p:sldId id="271" r:id="rId15"/>
-    <p:sldId id="263" r:id="rId16"/>
+    <p:sldId id="277" r:id="rId15"/>
+    <p:sldId id="278" r:id="rId16"/>
+    <p:sldId id="279" r:id="rId17"/>
+    <p:sldId id="280" r:id="rId18"/>
+    <p:sldId id="257" r:id="rId19"/>
   </p:sldIdLst>
   <p:sldSz cx="18288000" cy="10287000"/>
   <p:notesSz cx="6858000" cy="9144000"/>
   <p:embeddedFontLst>
     <p:embeddedFont>
-      <p:font typeface="Arimo" panose="020B0604020202020204"/>
-      <p:regular r:id="rId18"/>
-    </p:embeddedFont>
-    <p:embeddedFont>
-      <p:font typeface="Arimo Bold" panose="020B0704020202020204" pitchFamily="34" charset="0"/>
-      <p:regular r:id="rId19"/>
-      <p:bold r:id="rId20"/>
-    </p:embeddedFont>
-    <p:embeddedFont>
-      <p:font typeface="Calistoga"/>
+      <p:font typeface="Arimo" panose="020B0604020202020204" charset="0"/>
       <p:regular r:id="rId21"/>
     </p:embeddedFont>
     <p:embeddedFont>
-      <p:font typeface="Chewy" panose="02000000000000000000" pitchFamily="2" charset="0"/>
+      <p:font typeface="Arimo Bold" panose="020B0604020202020204" charset="0"/>
       <p:regular r:id="rId22"/>
+      <p:bold r:id="rId23"/>
     </p:embeddedFont>
     <p:embeddedFont>
-      <p:font typeface="Montserrat" pitchFamily="2" charset="77"/>
-      <p:regular r:id="rId23"/>
-      <p:bold r:id="rId24"/>
-      <p:italic r:id="rId25"/>
-      <p:boldItalic r:id="rId26"/>
+      <p:font typeface="Calistoga" panose="020B0604020202020204" charset="0"/>
+      <p:regular r:id="rId24"/>
     </p:embeddedFont>
     <p:embeddedFont>
-      <p:font typeface="Poppins Bold" pitchFamily="2" charset="77"/>
-      <p:bold r:id="rId27"/>
-      <p:italic r:id="rId28"/>
-      <p:boldItalic r:id="rId29"/>
+      <p:font typeface="Montserrat" panose="00000500000000000000" pitchFamily="2" charset="0"/>
+      <p:regular r:id="rId25"/>
+      <p:bold r:id="rId26"/>
+      <p:italic r:id="rId27"/>
+      <p:boldItalic r:id="rId28"/>
+    </p:embeddedFont>
+    <p:embeddedFont>
+      <p:font typeface="Poppins Bold" panose="020B0604020202020204" charset="0"/>
+      <p:bold r:id="rId29"/>
+      <p:italic r:id="rId30"/>
+      <p:boldItalic r:id="rId31"/>
     </p:embeddedFont>
   </p:embeddedFontLst>
   <p:defaultTextStyle>
@@ -254,7 +253,7 @@
           <a:p>
             <a:fld id="{B7268E1E-0E44-426D-905E-8AD9B19D2182}" type="datetimeFigureOut">
               <a:rPr lang="cs-CZ" smtClean="0"/>
-              <a:t>15.10.2026</a:t>
+              <a:t>16.10.2026</a:t>
             </a:fld>
             <a:endParaRPr lang="cs-CZ"/>
           </a:p>
@@ -754,7 +753,13 @@
   <p:cSld>
     <p:spTree>
       <p:nvGrpSpPr>
-        <p:cNvPr id="1" name=""/>
+        <p:cNvPr id="1" name="">
+          <a:extLst>
+            <a:ext uri="{FF2B5EF4-FFF2-40B4-BE49-F238E27FC236}">
+              <a16:creationId xmlns:a16="http://schemas.microsoft.com/office/drawing/2014/main" id="{7C73EC3C-08CA-078D-4C7B-237BD1294466}"/>
+            </a:ext>
+          </a:extLst>
+        </p:cNvPr>
         <p:cNvGrpSpPr/>
         <p:nvPr/>
       </p:nvGrpSpPr>
@@ -768,7 +773,13 @@
       </p:grpSpPr>
       <p:sp>
         <p:nvSpPr>
-          <p:cNvPr id="2" name="Header Placeholder 1"/>
+          <p:cNvPr id="2" name="Header Placeholder 1">
+            <a:extLst>
+              <a:ext uri="{FF2B5EF4-FFF2-40B4-BE49-F238E27FC236}">
+                <a16:creationId xmlns:a16="http://schemas.microsoft.com/office/drawing/2014/main" id="{DFA789EE-1674-FF28-9DF0-90B25C0DD11C}"/>
+              </a:ext>
+            </a:extLst>
+          </p:cNvPr>
           <p:cNvSpPr>
             <a:spLocks noGrp="1"/>
           </p:cNvSpPr>
@@ -799,7 +810,13 @@
       </p:sp>
       <p:sp>
         <p:nvSpPr>
-          <p:cNvPr id="3" name="Date Placeholder 2"/>
+          <p:cNvPr id="3" name="Date Placeholder 2">
+            <a:extLst>
+              <a:ext uri="{FF2B5EF4-FFF2-40B4-BE49-F238E27FC236}">
+                <a16:creationId xmlns:a16="http://schemas.microsoft.com/office/drawing/2014/main" id="{BD3F105D-9F63-D84C-B414-BF46FC51DB25}"/>
+              </a:ext>
+            </a:extLst>
+          </p:cNvPr>
           <p:cNvSpPr>
             <a:spLocks noGrp="1"/>
           </p:cNvSpPr>
@@ -833,7 +850,13 @@
       </p:sp>
       <p:sp>
         <p:nvSpPr>
-          <p:cNvPr id="4" name="Slide Image Placeholder 3"/>
+          <p:cNvPr id="4" name="Slide Image Placeholder 3">
+            <a:extLst>
+              <a:ext uri="{FF2B5EF4-FFF2-40B4-BE49-F238E27FC236}">
+                <a16:creationId xmlns:a16="http://schemas.microsoft.com/office/drawing/2014/main" id="{AC49F054-75B3-C89C-A2C0-44998A6A0FDD}"/>
+              </a:ext>
+            </a:extLst>
+          </p:cNvPr>
           <p:cNvSpPr>
             <a:spLocks noGrp="1" noRot="1" noChangeAspect="1"/>
           </p:cNvSpPr>
@@ -843,8 +866,8 @@
         </p:nvSpPr>
         <p:spPr>
           <a:xfrm>
-            <a:off x="2857500" y="512763"/>
-            <a:ext cx="3429000" cy="2566987"/>
+            <a:off x="2290763" y="512763"/>
+            <a:ext cx="4562475" cy="2566987"/>
           </a:xfrm>
           <a:prstGeom prst="rect">
             <a:avLst/>
@@ -866,7 +889,13 @@
       </p:sp>
       <p:sp>
         <p:nvSpPr>
-          <p:cNvPr id="5" name="Notes Placeholder 4"/>
+          <p:cNvPr id="5" name="Notes Placeholder 4">
+            <a:extLst>
+              <a:ext uri="{FF2B5EF4-FFF2-40B4-BE49-F238E27FC236}">
+                <a16:creationId xmlns:a16="http://schemas.microsoft.com/office/drawing/2014/main" id="{24CFBC13-B849-482D-3FD3-E1784C3FE8CC}"/>
+              </a:ext>
+            </a:extLst>
+          </p:cNvPr>
           <p:cNvSpPr>
             <a:spLocks noGrp="1"/>
           </p:cNvSpPr>
@@ -905,7 +934,13 @@
       </p:sp>
       <p:sp>
         <p:nvSpPr>
-          <p:cNvPr id="6" name="Footer Placeholder 5"/>
+          <p:cNvPr id="6" name="Footer Placeholder 5">
+            <a:extLst>
+              <a:ext uri="{FF2B5EF4-FFF2-40B4-BE49-F238E27FC236}">
+                <a16:creationId xmlns:a16="http://schemas.microsoft.com/office/drawing/2014/main" id="{C10C3DF9-F19E-5280-D6DD-AEFE09E79D65}"/>
+              </a:ext>
+            </a:extLst>
+          </p:cNvPr>
           <p:cNvSpPr>
             <a:spLocks noGrp="1"/>
           </p:cNvSpPr>
@@ -936,7 +971,13 @@
       </p:sp>
       <p:sp>
         <p:nvSpPr>
-          <p:cNvPr id="7" name="Slide Number Placeholder 6"/>
+          <p:cNvPr id="7" name="Slide Number Placeholder 6">
+            <a:extLst>
+              <a:ext uri="{FF2B5EF4-FFF2-40B4-BE49-F238E27FC236}">
+                <a16:creationId xmlns:a16="http://schemas.microsoft.com/office/drawing/2014/main" id="{A2821F2E-EAF0-B72C-E58C-4E9E5C0806DF}"/>
+              </a:ext>
+            </a:extLst>
+          </p:cNvPr>
           <p:cNvSpPr>
             <a:spLocks noGrp="1"/>
           </p:cNvSpPr>
@@ -969,6 +1010,11 @@
         </p:txBody>
       </p:sp>
     </p:spTree>
+    <p:extLst>
+      <p:ext uri="{BB962C8B-B14F-4D97-AF65-F5344CB8AC3E}">
+        <p14:creationId xmlns:p14="http://schemas.microsoft.com/office/powerpoint/2010/main" val="226023847"/>
+      </p:ext>
+    </p:extLst>
   </p:cSld>
   <p:clrMapOvr>
     <a:masterClrMapping/>
@@ -1070,8 +1116,8 @@
         </p:nvSpPr>
         <p:spPr>
           <a:xfrm>
-            <a:off x="2857500" y="512763"/>
-            <a:ext cx="3429000" cy="2566987"/>
+            <a:off x="2290763" y="512763"/>
+            <a:ext cx="4562475" cy="2566987"/>
           </a:xfrm>
           <a:prstGeom prst="rect">
             <a:avLst/>
@@ -1297,8 +1343,8 @@
         </p:nvSpPr>
         <p:spPr>
           <a:xfrm>
-            <a:off x="2857500" y="512763"/>
-            <a:ext cx="3429000" cy="2566987"/>
+            <a:off x="2290763" y="512763"/>
+            <a:ext cx="4562475" cy="2566987"/>
           </a:xfrm>
           <a:prstGeom prst="rect">
             <a:avLst/>
@@ -1524,8 +1570,8 @@
         </p:nvSpPr>
         <p:spPr>
           <a:xfrm>
-            <a:off x="2857500" y="512763"/>
-            <a:ext cx="3429000" cy="2566987"/>
+            <a:off x="2290763" y="512763"/>
+            <a:ext cx="4562475" cy="2566987"/>
           </a:xfrm>
           <a:prstGeom prst="rect">
             <a:avLst/>
@@ -1644,6 +1690,353 @@
           <a:p>
             <a:r>
               <a:rPr lang="cs-CZ"/>
+              <a:t>‹#›</a:t>
+            </a:r>
+          </a:p>
+        </p:txBody>
+      </p:sp>
+    </p:spTree>
+  </p:cSld>
+  <p:clrMapOvr>
+    <a:masterClrMapping/>
+  </p:clrMapOvr>
+</p:notes>
+</file>
+
+<file path=ppt/notesSlides/notesSlide6.xml><?xml version="1.0" encoding="utf-8"?>
+<p:notes xmlns:a="http://schemas.openxmlformats.org/drawingml/2006/main" xmlns:r="http://schemas.openxmlformats.org/officeDocument/2006/relationships" xmlns:p="http://schemas.openxmlformats.org/presentationml/2006/main">
+  <p:cSld>
+    <p:spTree>
+      <p:nvGrpSpPr>
+        <p:cNvPr id="1" name=""/>
+        <p:cNvGrpSpPr/>
+        <p:nvPr/>
+      </p:nvGrpSpPr>
+      <p:grpSpPr>
+        <a:xfrm>
+          <a:off x="0" y="0"/>
+          <a:ext cx="0" cy="0"/>
+          <a:chOff x="0" y="0"/>
+          <a:chExt cx="0" cy="0"/>
+        </a:xfrm>
+      </p:grpSpPr>
+      <p:sp>
+        <p:nvSpPr>
+          <p:cNvPr id="2" name="Header Placeholder 1"/>
+          <p:cNvSpPr>
+            <a:spLocks noGrp="1"/>
+          </p:cNvSpPr>
+          <p:nvPr>
+            <p:ph type="hdr" sz="quarter"/>
+          </p:nvPr>
+        </p:nvSpPr>
+        <p:spPr>
+          <a:xfrm>
+            <a:off x="0" y="0"/>
+            <a:ext cx="3962400" cy="342900"/>
+          </a:xfrm>
+          <a:prstGeom prst="rect">
+            <a:avLst/>
+          </a:prstGeom>
+        </p:spPr>
+        <p:txBody>
+          <a:bodyPr vert="horz" lIns="91440" tIns="45720" rIns="91440" bIns="45720" rtlCol="0"/>
+          <a:lstStyle>
+            <a:lvl1pPr algn="l">
+              <a:defRPr sz="1200"/>
+            </a:lvl1pPr>
+          </a:lstStyle>
+          <a:p>
+            <a:pPr marL="0" marR="0" lvl="0" indent="0" algn="l" defTabSz="914400" rtl="0" eaLnBrk="1" fontAlgn="auto" latinLnBrk="0" hangingPunct="1">
+              <a:lnSpc>
+                <a:spcPct val="100000"/>
+              </a:lnSpc>
+              <a:spcBef>
+                <a:spcPts val="0"/>
+              </a:spcBef>
+              <a:spcAft>
+                <a:spcPts val="0"/>
+              </a:spcAft>
+              <a:buClrTx/>
+              <a:buSzTx/>
+              <a:buFontTx/>
+              <a:buNone/>
+              <a:tabLst/>
+              <a:defRPr/>
+            </a:pPr>
+            <a:endParaRPr kumimoji="0" sz="1200" b="0" i="0" u="none" strike="noStrike" kern="1200" cap="none" spc="0" normalizeH="0" baseline="0" noProof="0">
+              <a:ln>
+                <a:noFill/>
+              </a:ln>
+              <a:solidFill>
+                <a:prstClr val="black"/>
+              </a:solidFill>
+              <a:effectLst/>
+              <a:uLnTx/>
+              <a:uFillTx/>
+              <a:latin typeface="Calibri"/>
+              <a:ea typeface="+mn-ea"/>
+              <a:cs typeface="+mn-cs"/>
+            </a:endParaRPr>
+          </a:p>
+        </p:txBody>
+      </p:sp>
+      <p:sp>
+        <p:nvSpPr>
+          <p:cNvPr id="3" name="Date Placeholder 2"/>
+          <p:cNvSpPr>
+            <a:spLocks noGrp="1"/>
+          </p:cNvSpPr>
+          <p:nvPr>
+            <p:ph type="dt" idx="1"/>
+          </p:nvPr>
+        </p:nvSpPr>
+        <p:spPr>
+          <a:xfrm>
+            <a:off x="5180013" y="0"/>
+            <a:ext cx="3962400" cy="342900"/>
+          </a:xfrm>
+          <a:prstGeom prst="rect">
+            <a:avLst/>
+          </a:prstGeom>
+        </p:spPr>
+        <p:txBody>
+          <a:bodyPr vert="horz" lIns="91440" tIns="45720" rIns="91440" bIns="45720" rtlCol="0"/>
+          <a:lstStyle>
+            <a:lvl1pPr algn="r">
+              <a:defRPr sz="1200"/>
+            </a:lvl1pPr>
+          </a:lstStyle>
+          <a:p>
+            <a:pPr marL="0" marR="0" lvl="0" indent="0" algn="r" defTabSz="914400" rtl="0" eaLnBrk="1" fontAlgn="auto" latinLnBrk="0" hangingPunct="1">
+              <a:lnSpc>
+                <a:spcPct val="100000"/>
+              </a:lnSpc>
+              <a:spcBef>
+                <a:spcPts val="0"/>
+              </a:spcBef>
+              <a:spcAft>
+                <a:spcPts val="0"/>
+              </a:spcAft>
+              <a:buClrTx/>
+              <a:buSzTx/>
+              <a:buFontTx/>
+              <a:buNone/>
+              <a:tabLst/>
+              <a:defRPr/>
+            </a:pPr>
+            <a:r>
+              <a:rPr kumimoji="0" lang="cs-CZ" sz="1200" b="0" i="0" u="none" strike="noStrike" kern="1200" cap="none" spc="0" normalizeH="0" baseline="0" noProof="0">
+                <a:ln>
+                  <a:noFill/>
+                </a:ln>
+                <a:solidFill>
+                  <a:prstClr val="black"/>
+                </a:solidFill>
+                <a:effectLst/>
+                <a:uLnTx/>
+                <a:uFillTx/>
+                <a:latin typeface="Calibri"/>
+                <a:ea typeface="+mn-ea"/>
+                <a:cs typeface="+mn-cs"/>
+              </a:rPr>
+              <a:t>1.7.2013</a:t>
+            </a:r>
+          </a:p>
+        </p:txBody>
+      </p:sp>
+      <p:sp>
+        <p:nvSpPr>
+          <p:cNvPr id="4" name="Slide Image Placeholder 3"/>
+          <p:cNvSpPr>
+            <a:spLocks noGrp="1" noRot="1" noChangeAspect="1"/>
+          </p:cNvSpPr>
+          <p:nvPr>
+            <p:ph type="sldImg" idx="2"/>
+          </p:nvPr>
+        </p:nvSpPr>
+        <p:spPr>
+          <a:xfrm>
+            <a:off x="2290763" y="512763"/>
+            <a:ext cx="4562475" cy="2566987"/>
+          </a:xfrm>
+          <a:prstGeom prst="rect">
+            <a:avLst/>
+          </a:prstGeom>
+          <a:noFill/>
+          <a:ln w="12700">
+            <a:solidFill>
+              <a:prstClr val="black"/>
+            </a:solidFill>
+          </a:ln>
+        </p:spPr>
+        <p:txBody>
+          <a:bodyPr vert="horz" lIns="91440" tIns="45720" rIns="91440" bIns="45720" rtlCol="0" anchor="ctr"/>
+          <a:lstStyle/>
+          <a:p>
+            <a:endParaRPr/>
+          </a:p>
+        </p:txBody>
+      </p:sp>
+      <p:sp>
+        <p:nvSpPr>
+          <p:cNvPr id="5" name="Notes Placeholder 4"/>
+          <p:cNvSpPr>
+            <a:spLocks noGrp="1"/>
+          </p:cNvSpPr>
+          <p:nvPr>
+            <p:ph type="body" sz="quarter" idx="3"/>
+          </p:nvPr>
+        </p:nvSpPr>
+        <p:spPr>
+          <a:xfrm>
+            <a:off x="914400" y="3251200"/>
+            <a:ext cx="7315200" cy="3081338"/>
+          </a:xfrm>
+          <a:prstGeom prst="rect">
+            <a:avLst/>
+          </a:prstGeom>
+        </p:spPr>
+        <p:txBody>
+          <a:bodyPr vert="horz" lIns="91440" tIns="45720" rIns="91440" bIns="45720" rtlCol="0"/>
+          <a:lstStyle/>
+          <a:p>
+            <a:r>
+              <a:rPr lang="en-US"/>
+              <a:t>C++ là ngôn ngữ cấp trung, có mục đích chung, ban đầu được phát triển bởi nhà khoa học máy tính người Đan Mạch Bjarne Stroustrup vào năm 1979 tại Phòng thí nghiệm Bell Hoa Kỳ. Như nhiều bạn đã biết, ngôn ngữ lập trình cấp trung là sự kết hợp giữa ngôn ngữ lập trình cấp thấp và cấp cao. Ngôn ngữ C++ ban đầu được thiết kế như một phần mở rộng của ngôn ngữ C, được sử dụng rộng rãi trong lập trình hệ thống và hệ điều hành dựa trên Unix. Ngoài ra, C được phát triển vào năm 1970 bởi Dennis Ritchie khi còn ở Bell Labs (trước đây là AT&amp;T Bell Labs). Trong những năm qua, C++ đã trở thành một trong những ngôn ngữ lập trình được sử dụng rộng rãi nhất và có nhiều ứng dụng trong các lĩnh vực như chơi game, robot, tài chính và tính toán khoa học. Các nhà phát triển cũng đã giới thiệu một số phiên bản mới của ngôn ngữ với những thay đổi đáng kể trên tinh thần luôn cập nhật và cạnh tranh với các ngôn ngữ lập trình hiện đại khác. Vì vậy, chúng ta hãy xem dòng thời gian và lịch sử phiên bản của C++.</a:t>
+            </a:r>
+          </a:p>
+          <a:p>
+            <a:endParaRPr lang="en-US"/>
+          </a:p>
+          <a:p>
+            <a:r>
+              <a:rPr lang="en-US"/>
+              <a:t>1</a:t>
+            </a:r>
+          </a:p>
+        </p:txBody>
+      </p:sp>
+      <p:sp>
+        <p:nvSpPr>
+          <p:cNvPr id="6" name="Footer Placeholder 5"/>
+          <p:cNvSpPr>
+            <a:spLocks noGrp="1"/>
+          </p:cNvSpPr>
+          <p:nvPr>
+            <p:ph type="ftr" sz="quarter" idx="4"/>
+          </p:nvPr>
+        </p:nvSpPr>
+        <p:spPr>
+          <a:xfrm>
+            <a:off x="0" y="6502400"/>
+            <a:ext cx="3962400" cy="341313"/>
+          </a:xfrm>
+          <a:prstGeom prst="rect">
+            <a:avLst/>
+          </a:prstGeom>
+        </p:spPr>
+        <p:txBody>
+          <a:bodyPr vert="horz" lIns="91440" tIns="45720" rIns="91440" bIns="45720" rtlCol="0" anchor="b"/>
+          <a:lstStyle>
+            <a:lvl1pPr algn="l">
+              <a:defRPr sz="1200"/>
+            </a:lvl1pPr>
+          </a:lstStyle>
+          <a:p>
+            <a:pPr marL="0" marR="0" lvl="0" indent="0" algn="l" defTabSz="914400" rtl="0" eaLnBrk="1" fontAlgn="auto" latinLnBrk="0" hangingPunct="1">
+              <a:lnSpc>
+                <a:spcPct val="100000"/>
+              </a:lnSpc>
+              <a:spcBef>
+                <a:spcPts val="0"/>
+              </a:spcBef>
+              <a:spcAft>
+                <a:spcPts val="0"/>
+              </a:spcAft>
+              <a:buClrTx/>
+              <a:buSzTx/>
+              <a:buFontTx/>
+              <a:buNone/>
+              <a:tabLst/>
+              <a:defRPr/>
+            </a:pPr>
+            <a:endParaRPr kumimoji="0" sz="1200" b="0" i="0" u="none" strike="noStrike" kern="1200" cap="none" spc="0" normalizeH="0" baseline="0" noProof="0">
+              <a:ln>
+                <a:noFill/>
+              </a:ln>
+              <a:solidFill>
+                <a:prstClr val="black"/>
+              </a:solidFill>
+              <a:effectLst/>
+              <a:uLnTx/>
+              <a:uFillTx/>
+              <a:latin typeface="Calibri"/>
+              <a:ea typeface="+mn-ea"/>
+              <a:cs typeface="+mn-cs"/>
+            </a:endParaRPr>
+          </a:p>
+        </p:txBody>
+      </p:sp>
+      <p:sp>
+        <p:nvSpPr>
+          <p:cNvPr id="7" name="Slide Number Placeholder 6"/>
+          <p:cNvSpPr>
+            <a:spLocks noGrp="1"/>
+          </p:cNvSpPr>
+          <p:nvPr>
+            <p:ph type="sldNum" sz="quarter" idx="5"/>
+          </p:nvPr>
+        </p:nvSpPr>
+        <p:spPr>
+          <a:xfrm>
+            <a:off x="5180013" y="6502400"/>
+            <a:ext cx="3962400" cy="341313"/>
+          </a:xfrm>
+          <a:prstGeom prst="rect">
+            <a:avLst/>
+          </a:prstGeom>
+        </p:spPr>
+        <p:txBody>
+          <a:bodyPr vert="horz" lIns="91440" tIns="45720" rIns="91440" bIns="45720" rtlCol="0" anchor="b"/>
+          <a:lstStyle>
+            <a:lvl1pPr algn="r">
+              <a:defRPr sz="1200"/>
+            </a:lvl1pPr>
+          </a:lstStyle>
+          <a:p>
+            <a:pPr marL="0" marR="0" lvl="0" indent="0" algn="r" defTabSz="914400" rtl="0" eaLnBrk="1" fontAlgn="auto" latinLnBrk="0" hangingPunct="1">
+              <a:lnSpc>
+                <a:spcPct val="100000"/>
+              </a:lnSpc>
+              <a:spcBef>
+                <a:spcPts val="0"/>
+              </a:spcBef>
+              <a:spcAft>
+                <a:spcPts val="0"/>
+              </a:spcAft>
+              <a:buClrTx/>
+              <a:buSzTx/>
+              <a:buFontTx/>
+              <a:buNone/>
+              <a:tabLst/>
+              <a:defRPr/>
+            </a:pPr>
+            <a:r>
+              <a:rPr kumimoji="0" lang="cs-CZ" sz="1200" b="0" i="0" u="none" strike="noStrike" kern="1200" cap="none" spc="0" normalizeH="0" baseline="0" noProof="0">
+                <a:ln>
+                  <a:noFill/>
+                </a:ln>
+                <a:solidFill>
+                  <a:prstClr val="black"/>
+                </a:solidFill>
+                <a:effectLst/>
+                <a:uLnTx/>
+                <a:uFillTx/>
+                <a:latin typeface="Calibri"/>
+                <a:ea typeface="+mn-ea"/>
+                <a:cs typeface="+mn-cs"/>
+              </a:rPr>
               <a:t>‹#›</a:t>
             </a:r>
           </a:p>
@@ -1837,7 +2230,7 @@
             <a:fld id="{1D8BD707-D9CF-40AE-B4C6-C98DA3205C09}" type="datetimeFigureOut">
               <a:rPr lang="en-US" smtClean="0"/>
               <a:pPr/>
-              <a:t>10/15/26</a:t>
+              <a:t>10/16/2026</a:t>
             </a:fld>
             <a:endParaRPr lang="en-US"/>
           </a:p>
@@ -2002,7 +2395,7 @@
             <a:fld id="{1D8BD707-D9CF-40AE-B4C6-C98DA3205C09}" type="datetimeFigureOut">
               <a:rPr lang="en-US" smtClean="0"/>
               <a:pPr/>
-              <a:t>10/15/26</a:t>
+              <a:t>10/16/2026</a:t>
             </a:fld>
             <a:endParaRPr lang="en-US"/>
           </a:p>
@@ -2177,7 +2570,7 @@
             <a:fld id="{1D8BD707-D9CF-40AE-B4C6-C98DA3205C09}" type="datetimeFigureOut">
               <a:rPr lang="en-US" smtClean="0"/>
               <a:pPr/>
-              <a:t>10/15/26</a:t>
+              <a:t>10/16/2026</a:t>
             </a:fld>
             <a:endParaRPr lang="en-US"/>
           </a:p>
@@ -2342,7 +2735,7 @@
             <a:fld id="{1D8BD707-D9CF-40AE-B4C6-C98DA3205C09}" type="datetimeFigureOut">
               <a:rPr lang="en-US" smtClean="0"/>
               <a:pPr/>
-              <a:t>10/15/26</a:t>
+              <a:t>10/16/2026</a:t>
             </a:fld>
             <a:endParaRPr lang="en-US"/>
           </a:p>
@@ -2584,7 +2977,7 @@
             <a:fld id="{1D8BD707-D9CF-40AE-B4C6-C98DA3205C09}" type="datetimeFigureOut">
               <a:rPr lang="en-US" smtClean="0"/>
               <a:pPr/>
-              <a:t>10/15/26</a:t>
+              <a:t>10/16/2026</a:t>
             </a:fld>
             <a:endParaRPr lang="en-US"/>
           </a:p>
@@ -2866,7 +3259,7 @@
             <a:fld id="{1D8BD707-D9CF-40AE-B4C6-C98DA3205C09}" type="datetimeFigureOut">
               <a:rPr lang="en-US" smtClean="0"/>
               <a:pPr/>
-              <a:t>10/15/26</a:t>
+              <a:t>10/16/2026</a:t>
             </a:fld>
             <a:endParaRPr lang="en-US"/>
           </a:p>
@@ -3282,7 +3675,7 @@
             <a:fld id="{1D8BD707-D9CF-40AE-B4C6-C98DA3205C09}" type="datetimeFigureOut">
               <a:rPr lang="en-US" smtClean="0"/>
               <a:pPr/>
-              <a:t>10/15/26</a:t>
+              <a:t>10/16/2026</a:t>
             </a:fld>
             <a:endParaRPr lang="en-US"/>
           </a:p>
@@ -3396,7 +3789,7 @@
             <a:fld id="{1D8BD707-D9CF-40AE-B4C6-C98DA3205C09}" type="datetimeFigureOut">
               <a:rPr lang="en-US" smtClean="0"/>
               <a:pPr/>
-              <a:t>10/15/26</a:t>
+              <a:t>10/16/2026</a:t>
             </a:fld>
             <a:endParaRPr lang="en-US"/>
           </a:p>
@@ -3488,7 +3881,7 @@
             <a:fld id="{1D8BD707-D9CF-40AE-B4C6-C98DA3205C09}" type="datetimeFigureOut">
               <a:rPr lang="en-US" smtClean="0"/>
               <a:pPr/>
-              <a:t>10/15/26</a:t>
+              <a:t>10/16/2026</a:t>
             </a:fld>
             <a:endParaRPr lang="en-US"/>
           </a:p>
@@ -3760,7 +4153,7 @@
             <a:fld id="{1D8BD707-D9CF-40AE-B4C6-C98DA3205C09}" type="datetimeFigureOut">
               <a:rPr lang="en-US" smtClean="0"/>
               <a:pPr/>
-              <a:t>10/15/26</a:t>
+              <a:t>10/16/2026</a:t>
             </a:fld>
             <a:endParaRPr lang="en-US"/>
           </a:p>
@@ -4009,7 +4402,7 @@
             <a:fld id="{1D8BD707-D9CF-40AE-B4C6-C98DA3205C09}" type="datetimeFigureOut">
               <a:rPr lang="en-US" smtClean="0"/>
               <a:pPr/>
-              <a:t>10/15/26</a:t>
+              <a:t>10/16/2026</a:t>
             </a:fld>
             <a:endParaRPr lang="en-US"/>
           </a:p>
@@ -4217,7 +4610,7 @@
             <a:fld id="{1D8BD707-D9CF-40AE-B4C6-C98DA3205C09}" type="datetimeFigureOut">
               <a:rPr lang="en-US" smtClean="0"/>
               <a:pPr/>
-              <a:t>10/15/26</a:t>
+              <a:t>10/16/2026</a:t>
             </a:fld>
             <a:endParaRPr lang="en-US"/>
           </a:p>
@@ -6287,7 +6680,7 @@
         <p:spPr>
           <a:xfrm>
             <a:off x="1024128" y="2240280"/>
-            <a:ext cx="16248888" cy="1188720"/>
+            <a:ext cx="16248888" cy="1568699"/>
           </a:xfrm>
           <a:prstGeom prst="rect">
             <a:avLst/>
@@ -6315,6 +6708,25 @@
                 <a:sym typeface="Arimo"/>
               </a:rPr>
               <a:t>NISQA scores each result, and examples whose quality or continuity drops too much are discarded.</a:t>
+            </a:r>
+          </a:p>
+          <a:p>
+            <a:pPr algn="l">
+              <a:lnSpc>
+                <a:spcPts val="4200"/>
+              </a:lnSpc>
+            </a:pPr>
+            <a:r>
+              <a:rPr lang="en-US" sz="3000" dirty="0">
+                <a:solidFill>
+                  <a:srgbClr val="000000"/>
+                </a:solidFill>
+                <a:latin typeface="Arimo"/>
+                <a:ea typeface="Arimo"/>
+                <a:cs typeface="Arimo"/>
+                <a:sym typeface="Arimo"/>
+              </a:rPr>
+              <a:t>* NISQA is an automated metric to score how natural an utterance is on several conditions</a:t>
             </a:r>
           </a:p>
         </p:txBody>
@@ -6335,8 +6747,8 @@
         </p:blipFill>
         <p:spPr>
           <a:xfrm>
-            <a:off x="5098192" y="3657600"/>
-            <a:ext cx="8091616" cy="4206240"/>
+            <a:off x="5509466" y="4370706"/>
+            <a:ext cx="7269068" cy="3778657"/>
           </a:xfrm>
           <a:prstGeom prst="rect">
             <a:avLst/>
@@ -6669,14 +7081,6 @@
 <file path=ppt/slides/slide12.xml><?xml version="1.0" encoding="utf-8"?>
 <p:sld xmlns:a="http://schemas.openxmlformats.org/drawingml/2006/main" xmlns:r="http://schemas.openxmlformats.org/officeDocument/2006/relationships" xmlns:p="http://schemas.openxmlformats.org/presentationml/2006/main">
   <p:cSld>
-    <p:bg>
-      <p:bgPr>
-        <a:solidFill>
-          <a:srgbClr val="F04453"/>
-        </a:solidFill>
-        <a:effectLst/>
-      </p:bgPr>
-    </p:bg>
     <p:spTree>
       <p:nvGrpSpPr>
         <p:cNvPr id="1" name=""/>
@@ -6699,6 +7103,59 @@
         </p:nvSpPr>
         <p:spPr>
           <a:xfrm>
+            <a:off x="0" y="9206494"/>
+            <a:ext cx="18288000" cy="1080508"/>
+          </a:xfrm>
+          <a:custGeom>
+            <a:avLst/>
+            <a:gdLst/>
+            <a:ahLst/>
+            <a:cxnLst/>
+            <a:rect l="l" t="t" r="r" b="b"/>
+            <a:pathLst>
+              <a:path w="18288000" h="1080508">
+                <a:moveTo>
+                  <a:pt x="0" y="0"/>
+                </a:moveTo>
+                <a:lnTo>
+                  <a:pt x="18288000" y="0"/>
+                </a:lnTo>
+                <a:lnTo>
+                  <a:pt x="18288000" y="1080508"/>
+                </a:lnTo>
+                <a:lnTo>
+                  <a:pt x="0" y="1080508"/>
+                </a:lnTo>
+                <a:lnTo>
+                  <a:pt x="0" y="0"/>
+                </a:lnTo>
+                <a:close/>
+              </a:path>
+            </a:pathLst>
+          </a:custGeom>
+          <a:blipFill>
+            <a:blip r:embed="rId2"/>
+            <a:stretch>
+              <a:fillRect l="-130" r="-130"/>
+            </a:stretch>
+          </a:blipFill>
+        </p:spPr>
+        <p:txBody>
+          <a:bodyPr/>
+          <a:lstStyle/>
+          <a:p>
+            <a:endParaRPr lang="en-VN"/>
+          </a:p>
+        </p:txBody>
+      </p:sp>
+      <p:sp>
+        <p:nvSpPr>
+          <p:cNvPr id="3" name="Freeform 3"/>
+          <p:cNvSpPr/>
+          <p:nvPr/>
+        </p:nvSpPr>
+        <p:spPr>
+          <a:xfrm>
             <a:off x="15326350" y="9512300"/>
             <a:ext cx="1950428" cy="429520"/>
           </a:xfrm>
@@ -6730,7 +7187,7 @@
             </a:pathLst>
           </a:custGeom>
           <a:blipFill>
-            <a:blip r:embed="rId2"/>
+            <a:blip r:embed="rId3"/>
             <a:stretch>
               <a:fillRect t="-240" b="-240"/>
             </a:stretch>
@@ -6746,7 +7203,7 @@
       </p:sp>
       <p:sp>
         <p:nvSpPr>
-          <p:cNvPr id="3" name="Freeform 3"/>
+          <p:cNvPr id="4" name="Freeform 4"/>
           <p:cNvSpPr/>
           <p:nvPr/>
         </p:nvSpPr>
@@ -6783,7 +7240,7 @@
             </a:pathLst>
           </a:custGeom>
           <a:blipFill>
-            <a:blip r:embed="rId2"/>
+            <a:blip r:embed="rId3"/>
             <a:stretch>
               <a:fillRect t="-240" b="-240"/>
             </a:stretch>
@@ -6799,7 +7256,7 @@
       </p:sp>
       <p:sp>
         <p:nvSpPr>
-          <p:cNvPr id="4" name="TextBox 4"/>
+          <p:cNvPr id="5" name="TextBox 5"/>
           <p:cNvSpPr txBox="1"/>
           <p:nvPr/>
         </p:nvSpPr>
@@ -6840,14 +7297,14 @@
       </p:sp>
       <p:sp>
         <p:nvSpPr>
-          <p:cNvPr id="5" name="TextBox 5"/>
+          <p:cNvPr id="6" name="TextBox 6"/>
           <p:cNvSpPr txBox="1"/>
           <p:nvPr/>
         </p:nvSpPr>
         <p:spPr>
           <a:xfrm>
-            <a:off x="1016858" y="4122746"/>
-            <a:ext cx="16242442" cy="1230630"/>
+            <a:off x="840740" y="9548495"/>
+            <a:ext cx="7754620" cy="425917"/>
           </a:xfrm>
           <a:prstGeom prst="rect">
             <a:avLst/>
@@ -6859,15 +7316,56 @@
           </a:bodyPr>
           <a:lstStyle/>
           <a:p>
+            <a:pPr algn="l">
+              <a:lnSpc>
+                <a:spcPts val="2520"/>
+              </a:lnSpc>
+            </a:pPr>
+            <a:r>
+              <a:rPr lang="en-US" sz="2100" spc="600">
+                <a:solidFill>
+                  <a:srgbClr val="B4B4B4"/>
+                </a:solidFill>
+                <a:latin typeface="Arimo"/>
+                <a:ea typeface="Arimo"/>
+                <a:cs typeface="Arimo"/>
+                <a:sym typeface="Arimo"/>
+              </a:rPr>
+              <a:t>www.viettel.com.vn</a:t>
+            </a:r>
+          </a:p>
+        </p:txBody>
+      </p:sp>
+      <p:sp>
+        <p:nvSpPr>
+          <p:cNvPr id="7" name="TextBox 7"/>
+          <p:cNvSpPr txBox="1"/>
+          <p:nvPr/>
+        </p:nvSpPr>
+        <p:spPr>
+          <a:xfrm>
+            <a:off x="1024128" y="886968"/>
+            <a:ext cx="16248888" cy="1042416"/>
+          </a:xfrm>
+          <a:prstGeom prst="rect">
+            <a:avLst/>
+          </a:prstGeom>
+        </p:spPr>
+        <p:txBody>
+          <a:bodyPr lIns="0" tIns="0" rIns="0" bIns="0" rtlCol="0" anchor="t">
+            <a:spAutoFit/>
+          </a:bodyPr>
+          <a:lstStyle/>
+          <a:p>
             <a:pPr algn="ctr">
               <a:lnSpc>
-                <a:spcPts val="8320"/>
+                <a:spcPts val="7880"/>
               </a:lnSpc>
             </a:pPr>
             <a:r>
-              <a:rPr lang="en-US" sz="8000" dirty="0">
-                <a:solidFill>
-                  <a:srgbClr val="FFFFFF"/>
+              <a:rPr lang="en-US" sz="7577" dirty="0">
+                <a:solidFill>
+                  <a:srgbClr val="E80500"/>
                 </a:solidFill>
                 <a:latin typeface="Calistoga"/>
                 <a:ea typeface="Calistoga"/>
@@ -6879,6 +7377,71 @@
           </a:p>
         </p:txBody>
       </p:sp>
+      <p:sp>
+        <p:nvSpPr>
+          <p:cNvPr id="8" name="TextBox 8"/>
+          <p:cNvSpPr txBox="1"/>
+          <p:nvPr/>
+        </p:nvSpPr>
+        <p:spPr>
+          <a:xfrm>
+            <a:off x="1024128" y="2240280"/>
+            <a:ext cx="16248888" cy="1188720"/>
+          </a:xfrm>
+          <a:prstGeom prst="rect">
+            <a:avLst/>
+          </a:prstGeom>
+        </p:spPr>
+        <p:txBody>
+          <a:bodyPr lIns="0" tIns="0" rIns="0" bIns="0" rtlCol="0" anchor="t">
+            <a:spAutoFit/>
+          </a:bodyPr>
+          <a:lstStyle/>
+          <a:p>
+            <a:pPr algn="l">
+              <a:lnSpc>
+                <a:spcPts val="4200"/>
+              </a:lnSpc>
+            </a:pPr>
+            <a:r>
+              <a:rPr lang="en-US" sz="3000" dirty="0">
+                <a:solidFill>
+                  <a:srgbClr val="000000"/>
+                </a:solidFill>
+                <a:latin typeface="Arimo"/>
+                <a:ea typeface="Arimo"/>
+                <a:cs typeface="Arimo"/>
+                <a:sym typeface="Arimo"/>
+              </a:rPr>
+              <a:t>OmniVoice is fine-tuned on the synthetic NVV data mixed with untagged ViVoice; at inference, an inline tag produces the sound in the cloned voice.</a:t>
+            </a:r>
+          </a:p>
+        </p:txBody>
+      </p:sp>
+      <p:pic>
+        <p:nvPicPr>
+          <p:cNvPr id="9" name="Figure finetune" descr="OmniVoice fine-tuned on NVV data plus ViVoice; at inference a tagged sentence and a reference voice give speech with the NVV"/>
+          <p:cNvPicPr>
+            <a:picLocks noChangeAspect="1"/>
+          </p:cNvPicPr>
+          <p:nvPr/>
+        </p:nvPicPr>
+        <p:blipFill>
+          <a:blip r:embed="rId4"/>
+          <a:stretch>
+            <a:fillRect/>
+          </a:stretch>
+        </p:blipFill>
+        <p:spPr>
+          <a:xfrm>
+            <a:off x="1097280" y="4457171"/>
+            <a:ext cx="16093440" cy="2607098"/>
+          </a:xfrm>
+          <a:prstGeom prst="rect">
+            <a:avLst/>
+          </a:prstGeom>
+        </p:spPr>
+      </p:pic>
     </p:spTree>
   </p:cSld>
   <p:clrMapOvr>
@@ -7255,7 +7818,7 @@
         <p:spPr>
           <a:xfrm>
             <a:off x="10037561" y="2510749"/>
-            <a:ext cx="6960444" cy="1466848"/>
+            <a:ext cx="6960444" cy="1576329"/>
           </a:xfrm>
           <a:prstGeom prst="rect">
             <a:avLst/>
@@ -7282,7 +7845,7 @@
                 <a:cs typeface="Arimo Bold"/>
                 <a:sym typeface="Arimo Bold"/>
               </a:rPr>
-              <a:t>No Vietnamese tags</a:t>
+              <a:t>Easy integration</a:t>
             </a:r>
           </a:p>
           <a:p>
@@ -7301,7 +7864,7 @@
                 <a:cs typeface="Arimo"/>
                 <a:sym typeface="Arimo"/>
               </a:rPr>
-              <a:t>Its tagged training data are Chinese and English only.</a:t>
+              <a:t>It can learn new NVV tags easily and give great result</a:t>
             </a:r>
           </a:p>
         </p:txBody>
@@ -7439,7 +8002,13 @@
   <p:cSld>
     <p:spTree>
       <p:nvGrpSpPr>
-        <p:cNvPr id="1" name=""/>
+        <p:cNvPr id="1" name="">
+          <a:extLst>
+            <a:ext uri="{FF2B5EF4-FFF2-40B4-BE49-F238E27FC236}">
+              <a16:creationId xmlns:a16="http://schemas.microsoft.com/office/drawing/2014/main" id="{820B342E-9645-EEC4-C6EF-61F53A0B731F}"/>
+            </a:ext>
+          </a:extLst>
+        </p:cNvPr>
         <p:cNvGrpSpPr/>
         <p:nvPr/>
       </p:nvGrpSpPr>
@@ -7453,7 +8022,13 @@
       </p:grpSpPr>
       <p:sp>
         <p:nvSpPr>
-          <p:cNvPr id="2" name="Freeform 2"/>
+          <p:cNvPr id="2" name="Freeform 2">
+            <a:extLst>
+              <a:ext uri="{FF2B5EF4-FFF2-40B4-BE49-F238E27FC236}">
+                <a16:creationId xmlns:a16="http://schemas.microsoft.com/office/drawing/2014/main" id="{A1991783-F261-488E-D074-A011A91D5BFA}"/>
+              </a:ext>
+            </a:extLst>
+          </p:cNvPr>
           <p:cNvSpPr/>
           <p:nvPr/>
         </p:nvSpPr>
@@ -7506,7 +8081,13 @@
       </p:sp>
       <p:sp>
         <p:nvSpPr>
-          <p:cNvPr id="3" name="Freeform 3"/>
+          <p:cNvPr id="3" name="Freeform 3">
+            <a:extLst>
+              <a:ext uri="{FF2B5EF4-FFF2-40B4-BE49-F238E27FC236}">
+                <a16:creationId xmlns:a16="http://schemas.microsoft.com/office/drawing/2014/main" id="{454DCD22-2C02-EACF-DAD6-08A67999CE03}"/>
+              </a:ext>
+            </a:extLst>
+          </p:cNvPr>
           <p:cNvSpPr/>
           <p:nvPr/>
         </p:nvSpPr>
@@ -7559,7 +8140,13 @@
       </p:sp>
       <p:sp>
         <p:nvSpPr>
-          <p:cNvPr id="4" name="Freeform 4"/>
+          <p:cNvPr id="4" name="Freeform 4">
+            <a:extLst>
+              <a:ext uri="{FF2B5EF4-FFF2-40B4-BE49-F238E27FC236}">
+                <a16:creationId xmlns:a16="http://schemas.microsoft.com/office/drawing/2014/main" id="{01273D87-3ACA-04FB-FAD8-2386DC66FE6D}"/>
+              </a:ext>
+            </a:extLst>
+          </p:cNvPr>
           <p:cNvSpPr/>
           <p:nvPr/>
         </p:nvSpPr>
@@ -7612,7 +8199,13 @@
       </p:sp>
       <p:sp>
         <p:nvSpPr>
-          <p:cNvPr id="5" name="TextBox 5"/>
+          <p:cNvPr id="5" name="TextBox 5">
+            <a:extLst>
+              <a:ext uri="{FF2B5EF4-FFF2-40B4-BE49-F238E27FC236}">
+                <a16:creationId xmlns:a16="http://schemas.microsoft.com/office/drawing/2014/main" id="{A11EE5C9-6FF0-B69B-FC90-115424B6CAD6}"/>
+              </a:ext>
+            </a:extLst>
+          </p:cNvPr>
           <p:cNvSpPr txBox="1"/>
           <p:nvPr/>
         </p:nvSpPr>
@@ -7653,7 +8246,13 @@
       </p:sp>
       <p:sp>
         <p:nvSpPr>
-          <p:cNvPr id="6" name="TextBox 6"/>
+          <p:cNvPr id="6" name="TextBox 6">
+            <a:extLst>
+              <a:ext uri="{FF2B5EF4-FFF2-40B4-BE49-F238E27FC236}">
+                <a16:creationId xmlns:a16="http://schemas.microsoft.com/office/drawing/2014/main" id="{E9710238-4F8A-6B91-C9C5-015C2301229F}"/>
+              </a:ext>
+            </a:extLst>
+          </p:cNvPr>
           <p:cNvSpPr txBox="1"/>
           <p:nvPr/>
         </p:nvSpPr>
@@ -7694,7 +8293,13 @@
       </p:sp>
       <p:sp>
         <p:nvSpPr>
-          <p:cNvPr id="7" name="TextBox 7"/>
+          <p:cNvPr id="7" name="TextBox 7">
+            <a:extLst>
+              <a:ext uri="{FF2B5EF4-FFF2-40B4-BE49-F238E27FC236}">
+                <a16:creationId xmlns:a16="http://schemas.microsoft.com/office/drawing/2014/main" id="{038D5646-B40C-55D2-8ACB-199FD18AC22F}"/>
+              </a:ext>
+            </a:extLst>
+          </p:cNvPr>
           <p:cNvSpPr txBox="1"/>
           <p:nvPr/>
         </p:nvSpPr>
@@ -7728,21 +8333,27 @@
                 <a:cs typeface="Calistoga"/>
                 <a:sym typeface="Calistoga"/>
               </a:rPr>
-              <a:t>Fine-tuning &amp; inference</a:t>
-            </a:r>
-          </a:p>
-        </p:txBody>
-      </p:sp>
-      <p:sp>
-        <p:nvSpPr>
-          <p:cNvPr id="8" name="TextBox 8"/>
+              <a:t>Result</a:t>
+            </a:r>
+          </a:p>
+        </p:txBody>
+      </p:sp>
+      <p:sp>
+        <p:nvSpPr>
+          <p:cNvPr id="8" name="TextBox 8">
+            <a:extLst>
+              <a:ext uri="{FF2B5EF4-FFF2-40B4-BE49-F238E27FC236}">
+                <a16:creationId xmlns:a16="http://schemas.microsoft.com/office/drawing/2014/main" id="{09E895CF-B0AD-C2CC-93F3-096E614D7468}"/>
+              </a:ext>
+            </a:extLst>
+          </p:cNvPr>
           <p:cNvSpPr txBox="1"/>
           <p:nvPr/>
         </p:nvSpPr>
         <p:spPr>
           <a:xfrm>
             <a:off x="1024128" y="2240280"/>
-            <a:ext cx="16248888" cy="1188720"/>
+            <a:ext cx="16248888" cy="491481"/>
           </a:xfrm>
           <a:prstGeom prst="rect">
             <a:avLst/>
@@ -7769,14 +8380,20 @@
                 <a:cs typeface="Arimo"/>
                 <a:sym typeface="Arimo"/>
               </a:rPr>
-              <a:t>OmniVoice is fine-tuned on the synthetic NVV data mixed with untagged ViVoice; at inference, an inline tag produces the sound in the cloned voice.</a:t>
+              <a:t>The first synthesize TTS with nonverbal element for Vietnamese, able to scale up for more tags</a:t>
             </a:r>
           </a:p>
         </p:txBody>
       </p:sp>
       <p:pic>
         <p:nvPicPr>
-          <p:cNvPr id="9" name="Figure finetune" descr="OmniVoice fine-tuned on NVV data plus ViVoice; at inference a tagged sentence and a reference voice give speech with the NVV"/>
+          <p:cNvPr id="12" name="Picture 11">
+            <a:extLst>
+              <a:ext uri="{FF2B5EF4-FFF2-40B4-BE49-F238E27FC236}">
+                <a16:creationId xmlns:a16="http://schemas.microsoft.com/office/drawing/2014/main" id="{648E79F0-3B15-1483-2F98-21E4326AD00F}"/>
+              </a:ext>
+            </a:extLst>
+          </p:cNvPr>
           <p:cNvPicPr>
             <a:picLocks noChangeAspect="1"/>
           </p:cNvPicPr>
@@ -7790,8 +8407,8 @@
         </p:blipFill>
         <p:spPr>
           <a:xfrm>
-            <a:off x="1097280" y="4457171"/>
-            <a:ext cx="16093440" cy="2607098"/>
+            <a:off x="3588738" y="3768756"/>
+            <a:ext cx="11110523" cy="3619576"/>
           </a:xfrm>
           <a:prstGeom prst="rect">
             <a:avLst/>
@@ -7799,6 +8416,11 @@
         </p:spPr>
       </p:pic>
     </p:spTree>
+    <p:extLst>
+      <p:ext uri="{BB962C8B-B14F-4D97-AF65-F5344CB8AC3E}">
+        <p14:creationId xmlns:p14="http://schemas.microsoft.com/office/powerpoint/2010/main" val="423689001"/>
+      </p:ext>
+    </p:extLst>
   </p:cSld>
   <p:clrMapOvr>
     <a:masterClrMapping/>
@@ -7809,17 +8431,15 @@
 <file path=ppt/slides/slide15.xml><?xml version="1.0" encoding="utf-8"?>
 <p:sld xmlns:a="http://schemas.openxmlformats.org/drawingml/2006/main" xmlns:r="http://schemas.openxmlformats.org/officeDocument/2006/relationships" xmlns:p="http://schemas.openxmlformats.org/presentationml/2006/main">
   <p:cSld>
-    <p:bg>
-      <p:bgPr>
-        <a:solidFill>
-          <a:srgbClr val="24304D"/>
-        </a:solidFill>
-        <a:effectLst/>
-      </p:bgPr>
-    </p:bg>
     <p:spTree>
       <p:nvGrpSpPr>
-        <p:cNvPr id="1" name=""/>
+        <p:cNvPr id="1" name="">
+          <a:extLst>
+            <a:ext uri="{FF2B5EF4-FFF2-40B4-BE49-F238E27FC236}">
+              <a16:creationId xmlns:a16="http://schemas.microsoft.com/office/drawing/2014/main" id="{2E82ECF2-237C-FBDB-B532-1B54220FB82C}"/>
+            </a:ext>
+          </a:extLst>
+        </p:cNvPr>
         <p:cNvGrpSpPr/>
         <p:nvPr/>
       </p:nvGrpSpPr>
@@ -7833,14 +8453,20 @@
       </p:grpSpPr>
       <p:sp>
         <p:nvSpPr>
-          <p:cNvPr id="2" name="Freeform 2"/>
+          <p:cNvPr id="2" name="Freeform 2">
+            <a:extLst>
+              <a:ext uri="{FF2B5EF4-FFF2-40B4-BE49-F238E27FC236}">
+                <a16:creationId xmlns:a16="http://schemas.microsoft.com/office/drawing/2014/main" id="{84451A41-C096-A89F-14BD-3DA454F5FBCF}"/>
+              </a:ext>
+            </a:extLst>
+          </p:cNvPr>
           <p:cNvSpPr/>
           <p:nvPr/>
         </p:nvSpPr>
         <p:spPr>
-          <a:xfrm rot="5262104">
-            <a:off x="-136297" y="-4136797"/>
-            <a:ext cx="18560594" cy="18560594"/>
+          <a:xfrm>
+            <a:off x="0" y="9206494"/>
+            <a:ext cx="18288000" cy="1080508"/>
           </a:xfrm>
           <a:custGeom>
             <a:avLst/>
@@ -7849,18 +8475,18 @@
             <a:cxnLst/>
             <a:rect l="l" t="t" r="r" b="b"/>
             <a:pathLst>
-              <a:path w="18560594" h="18560594">
+              <a:path w="18288000" h="1080508">
                 <a:moveTo>
                   <a:pt x="0" y="0"/>
                 </a:moveTo>
                 <a:lnTo>
-                  <a:pt x="18560594" y="0"/>
-                </a:lnTo>
-                <a:lnTo>
-                  <a:pt x="18560594" y="18560594"/>
-                </a:lnTo>
-                <a:lnTo>
-                  <a:pt x="0" y="18560594"/>
+                  <a:pt x="18288000" y="0"/>
+                </a:lnTo>
+                <a:lnTo>
+                  <a:pt x="18288000" y="1080508"/>
+                </a:lnTo>
+                <a:lnTo>
+                  <a:pt x="0" y="1080508"/>
                 </a:lnTo>
                 <a:lnTo>
                   <a:pt x="0" y="0"/>
@@ -7870,16 +8496,9 @@
             </a:pathLst>
           </a:custGeom>
           <a:blipFill>
-            <a:blip>
-              <a:alphaModFix amt="19999"/>
-              <a:extLst>
-                <a:ext uri="{96DAC541-7B7A-43D3-8B79-37D633B846F1}">
-                  <asvg:svgBlip xmlns:asvg="http://schemas.microsoft.com/office/drawing/2016/SVG/main" r:embed="rId2"/>
-                </a:ext>
-              </a:extLst>
-            </a:blip>
+            <a:blip r:embed="rId10"/>
             <a:stretch>
-              <a:fillRect/>
+              <a:fillRect l="-130" r="-130"/>
             </a:stretch>
           </a:blipFill>
         </p:spPr>
@@ -7893,243 +8512,20 @@
       </p:sp>
       <p:sp>
         <p:nvSpPr>
-          <p:cNvPr id="3" name="TextBox 3"/>
-          <p:cNvSpPr txBox="1"/>
-          <p:nvPr/>
-        </p:nvSpPr>
-        <p:spPr>
-          <a:xfrm rot="-148252">
-            <a:off x="1440715" y="3249929"/>
-            <a:ext cx="15361365" cy="2622784"/>
-          </a:xfrm>
-          <a:prstGeom prst="rect">
-            <a:avLst/>
-          </a:prstGeom>
-        </p:spPr>
-        <p:txBody>
-          <a:bodyPr lIns="0" tIns="0" rIns="0" bIns="0" rtlCol="0" anchor="t">
-            <a:spAutoFit/>
-          </a:bodyPr>
-          <a:lstStyle/>
-          <a:p>
-            <a:pPr algn="ctr">
-              <a:lnSpc>
-                <a:spcPts val="18329"/>
-              </a:lnSpc>
-            </a:pPr>
-            <a:r>
-              <a:rPr lang="en-US" sz="21820">
-                <a:solidFill>
-                  <a:srgbClr val="FFFFFF"/>
-                </a:solidFill>
-                <a:latin typeface="Chewy"/>
-                <a:ea typeface="Chewy"/>
-                <a:cs typeface="Chewy"/>
-                <a:sym typeface="Chewy"/>
-              </a:rPr>
-              <a:t>THANK YOU</a:t>
-            </a:r>
-          </a:p>
-        </p:txBody>
-      </p:sp>
-      <p:grpSp>
-        <p:nvGrpSpPr>
-          <p:cNvPr id="4" name="Group 4"/>
-          <p:cNvGrpSpPr/>
-          <p:nvPr/>
-        </p:nvGrpSpPr>
-        <p:grpSpPr>
-          <a:xfrm rot="-148252">
-            <a:off x="4631266" y="5659619"/>
-            <a:ext cx="9164844" cy="2080874"/>
-            <a:chOff x="0" y="0"/>
-            <a:chExt cx="2425118" cy="550622"/>
-          </a:xfrm>
-        </p:grpSpPr>
-        <p:sp>
-          <p:nvSpPr>
-            <p:cNvPr id="5" name="Freeform 5"/>
-            <p:cNvSpPr/>
-            <p:nvPr/>
-          </p:nvSpPr>
-          <p:spPr>
-            <a:xfrm>
-              <a:off x="0" y="0"/>
-              <a:ext cx="2425118" cy="550622"/>
-            </a:xfrm>
-            <a:custGeom>
-              <a:avLst/>
-              <a:gdLst/>
-              <a:ahLst/>
-              <a:cxnLst/>
-              <a:rect l="l" t="t" r="r" b="b"/>
-              <a:pathLst>
-                <a:path w="2425118" h="550622">
-                  <a:moveTo>
-                    <a:pt x="25342" y="0"/>
-                  </a:moveTo>
-                  <a:lnTo>
-                    <a:pt x="2399776" y="0"/>
-                  </a:lnTo>
-                  <a:cubicBezTo>
-                    <a:pt x="2413772" y="0"/>
-                    <a:pt x="2425118" y="11346"/>
-                    <a:pt x="2425118" y="25342"/>
-                  </a:cubicBezTo>
-                  <a:lnTo>
-                    <a:pt x="2425118" y="525280"/>
-                  </a:lnTo>
-                  <a:cubicBezTo>
-                    <a:pt x="2425118" y="539276"/>
-                    <a:pt x="2413772" y="550622"/>
-                    <a:pt x="2399776" y="550622"/>
-                  </a:cubicBezTo>
-                  <a:lnTo>
-                    <a:pt x="25342" y="550622"/>
-                  </a:lnTo>
-                  <a:cubicBezTo>
-                    <a:pt x="11346" y="550622"/>
-                    <a:pt x="0" y="539276"/>
-                    <a:pt x="0" y="525280"/>
-                  </a:cubicBezTo>
-                  <a:lnTo>
-                    <a:pt x="0" y="25342"/>
-                  </a:lnTo>
-                  <a:cubicBezTo>
-                    <a:pt x="0" y="11346"/>
-                    <a:pt x="11346" y="0"/>
-                    <a:pt x="25342" y="0"/>
-                  </a:cubicBezTo>
-                  <a:close/>
-                </a:path>
-              </a:pathLst>
-            </a:custGeom>
-            <a:solidFill>
-              <a:srgbClr val="CF3F2C"/>
-            </a:solidFill>
-          </p:spPr>
-          <p:txBody>
-            <a:bodyPr/>
-            <a:lstStyle/>
-            <a:p>
-              <a:endParaRPr lang="en-VN"/>
-            </a:p>
-          </p:txBody>
-        </p:sp>
-        <p:sp>
-          <p:nvSpPr>
-            <p:cNvPr id="6" name="TextBox 6"/>
-            <p:cNvSpPr txBox="1"/>
-            <p:nvPr/>
-          </p:nvSpPr>
-          <p:spPr>
-            <a:xfrm>
-              <a:off x="0" y="-19050"/>
-              <a:ext cx="2425118" cy="569672"/>
-            </a:xfrm>
-            <a:prstGeom prst="rect">
-              <a:avLst/>
-            </a:prstGeom>
-          </p:spPr>
-          <p:txBody>
-            <a:bodyPr lIns="50800" tIns="50800" rIns="50800" bIns="50800" rtlCol="0" anchor="ctr"/>
-            <a:lstStyle/>
-            <a:p>
-              <a:pPr algn="ctr">
-                <a:lnSpc>
-                  <a:spcPts val="2393"/>
-                </a:lnSpc>
-              </a:pPr>
-              <a:endParaRPr/>
-            </a:p>
-          </p:txBody>
-        </p:sp>
-      </p:grpSp>
-      <p:pic>
-        <p:nvPicPr>
-          <p:cNvPr id="7" name="Picture 7"/>
-          <p:cNvPicPr>
-            <a:picLocks noChangeAspect="1"/>
-          </p:cNvPicPr>
-          <p:nvPr/>
-        </p:nvPicPr>
-        <p:blipFill>
-          <a:blip r:embed="rId3"/>
-          <a:srcRect/>
-          <a:stretch>
-            <a:fillRect/>
-          </a:stretch>
-        </p:blipFill>
-        <p:spPr>
-          <a:xfrm rot="-313159">
-            <a:off x="12220482" y="6583921"/>
-            <a:ext cx="4430394" cy="3632923"/>
-          </a:xfrm>
-          <a:prstGeom prst="rect">
-            <a:avLst/>
-          </a:prstGeom>
-        </p:spPr>
-      </p:pic>
-      <p:pic>
-        <p:nvPicPr>
-          <p:cNvPr id="8" name="Picture 8"/>
-          <p:cNvPicPr>
-            <a:picLocks noChangeAspect="1"/>
-          </p:cNvPicPr>
-          <p:nvPr/>
-        </p:nvPicPr>
-        <p:blipFill>
-          <a:blip r:embed="rId4"/>
-          <a:srcRect/>
-          <a:stretch>
-            <a:fillRect/>
-          </a:stretch>
-        </p:blipFill>
-        <p:spPr>
-          <a:xfrm>
-            <a:off x="3206031" y="6222353"/>
-            <a:ext cx="1049285" cy="1054558"/>
-          </a:xfrm>
-          <a:prstGeom prst="rect">
-            <a:avLst/>
-          </a:prstGeom>
-        </p:spPr>
-      </p:pic>
-      <p:pic>
-        <p:nvPicPr>
-          <p:cNvPr id="9" name="Picture 9"/>
-          <p:cNvPicPr>
-            <a:picLocks noChangeAspect="1"/>
-          </p:cNvPicPr>
-          <p:nvPr/>
-        </p:nvPicPr>
-        <p:blipFill>
-          <a:blip r:embed="rId5"/>
-          <a:srcRect/>
-          <a:stretch>
-            <a:fillRect/>
-          </a:stretch>
-        </p:blipFill>
-        <p:spPr>
-          <a:xfrm rot="-2260066">
-            <a:off x="625171" y="1747954"/>
-            <a:ext cx="3754524" cy="1971125"/>
-          </a:xfrm>
-          <a:prstGeom prst="rect">
-            <a:avLst/>
-          </a:prstGeom>
-        </p:spPr>
-      </p:pic>
-      <p:sp>
-        <p:nvSpPr>
-          <p:cNvPr id="10" name="Freeform 10"/>
+          <p:cNvPr id="3" name="Freeform 3">
+            <a:extLst>
+              <a:ext uri="{FF2B5EF4-FFF2-40B4-BE49-F238E27FC236}">
+                <a16:creationId xmlns:a16="http://schemas.microsoft.com/office/drawing/2014/main" id="{7E6B25D6-8984-4D3B-4259-144957B24968}"/>
+              </a:ext>
+            </a:extLst>
+          </p:cNvPr>
           <p:cNvSpPr/>
           <p:nvPr/>
         </p:nvSpPr>
         <p:spPr>
-          <a:xfrm rot="2163578">
-            <a:off x="-6124983" y="7865865"/>
-            <a:ext cx="16230600" cy="6066187"/>
+          <a:xfrm>
+            <a:off x="15326350" y="9512300"/>
+            <a:ext cx="1950428" cy="429520"/>
           </a:xfrm>
           <a:custGeom>
             <a:avLst/>
@@ -8138,18 +8534,18 @@
             <a:cxnLst/>
             <a:rect l="l" t="t" r="r" b="b"/>
             <a:pathLst>
-              <a:path w="16230600" h="6066187">
+              <a:path w="1950428" h="429520">
                 <a:moveTo>
                   <a:pt x="0" y="0"/>
                 </a:moveTo>
                 <a:lnTo>
-                  <a:pt x="16230600" y="0"/>
-                </a:lnTo>
-                <a:lnTo>
-                  <a:pt x="16230600" y="6066187"/>
-                </a:lnTo>
-                <a:lnTo>
-                  <a:pt x="0" y="6066187"/>
+                  <a:pt x="1950428" y="0"/>
+                </a:lnTo>
+                <a:lnTo>
+                  <a:pt x="1950428" y="429520"/>
+                </a:lnTo>
+                <a:lnTo>
+                  <a:pt x="0" y="429520"/>
                 </a:lnTo>
                 <a:lnTo>
                   <a:pt x="0" y="0"/>
@@ -8159,9 +8555,9 @@
             </a:pathLst>
           </a:custGeom>
           <a:blipFill>
-            <a:blip r:embed="rId6"/>
+            <a:blip r:embed="rId11"/>
             <a:stretch>
-              <a:fillRect/>
+              <a:fillRect t="-240" b="-240"/>
             </a:stretch>
           </a:blipFill>
         </p:spPr>
@@ -8175,14 +8571,20 @@
       </p:sp>
       <p:sp>
         <p:nvSpPr>
-          <p:cNvPr id="11" name="Freeform 11"/>
+          <p:cNvPr id="4" name="Freeform 4">
+            <a:extLst>
+              <a:ext uri="{FF2B5EF4-FFF2-40B4-BE49-F238E27FC236}">
+                <a16:creationId xmlns:a16="http://schemas.microsoft.com/office/drawing/2014/main" id="{732EF181-3C1C-6F88-EFE0-0DFF958505C0}"/>
+              </a:ext>
+            </a:extLst>
+          </p:cNvPr>
           <p:cNvSpPr/>
           <p:nvPr/>
         </p:nvSpPr>
         <p:spPr>
-          <a:xfrm rot="2163578">
-            <a:off x="11809367" y="-807749"/>
-            <a:ext cx="16230600" cy="6066187"/>
+          <a:xfrm>
+            <a:off x="15326350" y="9512300"/>
+            <a:ext cx="1950428" cy="429520"/>
           </a:xfrm>
           <a:custGeom>
             <a:avLst/>
@@ -8191,18 +8593,18 @@
             <a:cxnLst/>
             <a:rect l="l" t="t" r="r" b="b"/>
             <a:pathLst>
-              <a:path w="16230600" h="6066187">
+              <a:path w="1950428" h="429520">
                 <a:moveTo>
                   <a:pt x="0" y="0"/>
                 </a:moveTo>
                 <a:lnTo>
-                  <a:pt x="16230600" y="0"/>
-                </a:lnTo>
-                <a:lnTo>
-                  <a:pt x="16230600" y="6066186"/>
-                </a:lnTo>
-                <a:lnTo>
-                  <a:pt x="0" y="6066186"/>
+                  <a:pt x="1950428" y="0"/>
+                </a:lnTo>
+                <a:lnTo>
+                  <a:pt x="1950428" y="429520"/>
+                </a:lnTo>
+                <a:lnTo>
+                  <a:pt x="0" y="429520"/>
                 </a:lnTo>
                 <a:lnTo>
                   <a:pt x="0" y="0"/>
@@ -8212,9 +8614,9 @@
             </a:pathLst>
           </a:custGeom>
           <a:blipFill>
-            <a:blip r:embed="rId6"/>
+            <a:blip r:embed="rId11"/>
             <a:stretch>
-              <a:fillRect/>
+              <a:fillRect t="-240" b="-240"/>
             </a:stretch>
           </a:blipFill>
         </p:spPr>
@@ -8228,14 +8630,20 @@
       </p:sp>
       <p:sp>
         <p:nvSpPr>
-          <p:cNvPr id="12" name="TextBox 12"/>
+          <p:cNvPr id="5" name="TextBox 5">
+            <a:extLst>
+              <a:ext uri="{FF2B5EF4-FFF2-40B4-BE49-F238E27FC236}">
+                <a16:creationId xmlns:a16="http://schemas.microsoft.com/office/drawing/2014/main" id="{47F694EE-B3C9-2864-DEF4-A9BE210F92C0}"/>
+              </a:ext>
+            </a:extLst>
+          </p:cNvPr>
           <p:cNvSpPr txBox="1"/>
           <p:nvPr/>
         </p:nvSpPr>
         <p:spPr>
-          <a:xfrm rot="-148252">
-            <a:off x="5395086" y="6275771"/>
-            <a:ext cx="7650753" cy="1162604"/>
+          <a:xfrm>
+            <a:off x="840740" y="9548495"/>
+            <a:ext cx="7754620" cy="425917"/>
           </a:xfrm>
           <a:prstGeom prst="rect">
             <a:avLst/>
@@ -8247,27 +8655,1540 @@
           </a:bodyPr>
           <a:lstStyle/>
           <a:p>
+            <a:pPr algn="l">
+              <a:lnSpc>
+                <a:spcPts val="2520"/>
+              </a:lnSpc>
+            </a:pPr>
+            <a:r>
+              <a:rPr lang="en-US" sz="2100" spc="600">
+                <a:solidFill>
+                  <a:srgbClr val="B4B4B4"/>
+                </a:solidFill>
+                <a:latin typeface="Arimo"/>
+                <a:ea typeface="Arimo"/>
+                <a:cs typeface="Arimo"/>
+                <a:sym typeface="Arimo"/>
+              </a:rPr>
+              <a:t>www.viettel.com.vn</a:t>
+            </a:r>
+          </a:p>
+        </p:txBody>
+      </p:sp>
+      <p:sp>
+        <p:nvSpPr>
+          <p:cNvPr id="6" name="TextBox 6">
+            <a:extLst>
+              <a:ext uri="{FF2B5EF4-FFF2-40B4-BE49-F238E27FC236}">
+                <a16:creationId xmlns:a16="http://schemas.microsoft.com/office/drawing/2014/main" id="{1CF89BA5-0811-C0B1-26C9-99B8F844C37F}"/>
+              </a:ext>
+            </a:extLst>
+          </p:cNvPr>
+          <p:cNvSpPr txBox="1"/>
+          <p:nvPr/>
+        </p:nvSpPr>
+        <p:spPr>
+          <a:xfrm>
+            <a:off x="840740" y="9548495"/>
+            <a:ext cx="7754620" cy="425917"/>
+          </a:xfrm>
+          <a:prstGeom prst="rect">
+            <a:avLst/>
+          </a:prstGeom>
+        </p:spPr>
+        <p:txBody>
+          <a:bodyPr lIns="0" tIns="0" rIns="0" bIns="0" rtlCol="0" anchor="t">
+            <a:spAutoFit/>
+          </a:bodyPr>
+          <a:lstStyle/>
+          <a:p>
+            <a:pPr algn="l">
+              <a:lnSpc>
+                <a:spcPts val="2520"/>
+              </a:lnSpc>
+            </a:pPr>
+            <a:r>
+              <a:rPr lang="en-US" sz="2100" spc="600">
+                <a:solidFill>
+                  <a:srgbClr val="B4B4B4"/>
+                </a:solidFill>
+                <a:latin typeface="Arimo"/>
+                <a:ea typeface="Arimo"/>
+                <a:cs typeface="Arimo"/>
+                <a:sym typeface="Arimo"/>
+              </a:rPr>
+              <a:t>www.viettel.com.vn</a:t>
+            </a:r>
+          </a:p>
+        </p:txBody>
+      </p:sp>
+      <p:sp>
+        <p:nvSpPr>
+          <p:cNvPr id="7" name="TextBox 7">
+            <a:extLst>
+              <a:ext uri="{FF2B5EF4-FFF2-40B4-BE49-F238E27FC236}">
+                <a16:creationId xmlns:a16="http://schemas.microsoft.com/office/drawing/2014/main" id="{4FC781FA-4A7F-6D0F-433F-EFDB67E0A083}"/>
+              </a:ext>
+            </a:extLst>
+          </p:cNvPr>
+          <p:cNvSpPr txBox="1"/>
+          <p:nvPr/>
+        </p:nvSpPr>
+        <p:spPr>
+          <a:xfrm>
+            <a:off x="1024128" y="886968"/>
+            <a:ext cx="16248888" cy="1042416"/>
+          </a:xfrm>
+          <a:prstGeom prst="rect">
+            <a:avLst/>
+          </a:prstGeom>
+        </p:spPr>
+        <p:txBody>
+          <a:bodyPr lIns="0" tIns="0" rIns="0" bIns="0" rtlCol="0" anchor="t">
+            <a:spAutoFit/>
+          </a:bodyPr>
+          <a:lstStyle/>
+          <a:p>
             <a:pPr algn="ctr">
               <a:lnSpc>
-                <a:spcPts val="8158"/>
+                <a:spcPts val="7880"/>
               </a:lnSpc>
             </a:pPr>
             <a:r>
-              <a:rPr lang="en-US" sz="9712">
-                <a:solidFill>
-                  <a:srgbClr val="FFFFFF"/>
-                </a:solidFill>
-                <a:latin typeface="Chewy"/>
-                <a:ea typeface="Chewy"/>
-                <a:cs typeface="Chewy"/>
-                <a:sym typeface="Chewy"/>
+              <a:rPr lang="en-US" sz="7577" dirty="0">
+                <a:solidFill>
+                  <a:srgbClr val="E80500"/>
+                </a:solidFill>
+                <a:latin typeface="Calistoga"/>
+                <a:ea typeface="Calistoga"/>
+                <a:cs typeface="Calistoga"/>
+                <a:sym typeface="Calistoga"/>
               </a:rPr>
-              <a:t>FOR LISTENING</a:t>
-            </a:r>
+              <a:t>Result</a:t>
+            </a:r>
+          </a:p>
+        </p:txBody>
+      </p:sp>
+      <p:sp>
+        <p:nvSpPr>
+          <p:cNvPr id="8" name="TextBox 8">
+            <a:extLst>
+              <a:ext uri="{FF2B5EF4-FFF2-40B4-BE49-F238E27FC236}">
+                <a16:creationId xmlns:a16="http://schemas.microsoft.com/office/drawing/2014/main" id="{EAE43332-3E00-F9BC-4E3D-D34B2DA92C8B}"/>
+              </a:ext>
+            </a:extLst>
+          </p:cNvPr>
+          <p:cNvSpPr txBox="1"/>
+          <p:nvPr/>
+        </p:nvSpPr>
+        <p:spPr>
+          <a:xfrm>
+            <a:off x="1024128" y="2240280"/>
+            <a:ext cx="16248888" cy="491481"/>
+          </a:xfrm>
+          <a:prstGeom prst="rect">
+            <a:avLst/>
+          </a:prstGeom>
+        </p:spPr>
+        <p:txBody>
+          <a:bodyPr lIns="0" tIns="0" rIns="0" bIns="0" rtlCol="0" anchor="t">
+            <a:spAutoFit/>
+          </a:bodyPr>
+          <a:lstStyle/>
+          <a:p>
+            <a:pPr algn="l">
+              <a:lnSpc>
+                <a:spcPts val="4200"/>
+              </a:lnSpc>
+            </a:pPr>
+            <a:r>
+              <a:rPr lang="en-US" sz="3000" dirty="0">
+                <a:solidFill>
+                  <a:srgbClr val="000000"/>
+                </a:solidFill>
+                <a:latin typeface="Arimo"/>
+                <a:ea typeface="Arimo"/>
+                <a:cs typeface="Arimo"/>
+                <a:sym typeface="Arimo"/>
+              </a:rPr>
+              <a:t>The first synthesize TTS system to speak with nonverbal cue effectively</a:t>
+            </a:r>
+          </a:p>
+        </p:txBody>
+      </p:sp>
+      <p:pic>
+        <p:nvPicPr>
+          <p:cNvPr id="9" name="throatclearing">
+            <a:hlinkClick r:id="" action="ppaction://media"/>
+            <a:extLst>
+              <a:ext uri="{FF2B5EF4-FFF2-40B4-BE49-F238E27FC236}">
+                <a16:creationId xmlns:a16="http://schemas.microsoft.com/office/drawing/2014/main" id="{858B9B53-D1A5-D8AB-B4CD-EDE37DFE0052}"/>
+              </a:ext>
+            </a:extLst>
+          </p:cNvPr>
+          <p:cNvPicPr>
+            <a:picLocks noChangeAspect="1"/>
+          </p:cNvPicPr>
+          <p:nvPr>
+            <a:audioFile r:link="rId2"/>
+            <p:extLst>
+              <p:ext uri="{DAA4B4D4-6D71-4841-9C94-3DE7FCFB9230}">
+                <p14:media xmlns:p14="http://schemas.microsoft.com/office/powerpoint/2010/main" r:embed="rId1"/>
+              </p:ext>
+            </p:extLst>
+          </p:nvPr>
+        </p:nvPicPr>
+        <p:blipFill>
+          <a:blip r:embed="rId12"/>
+          <a:stretch>
+            <a:fillRect/>
+          </a:stretch>
+        </p:blipFill>
+        <p:spPr>
+          <a:xfrm>
+            <a:off x="2667000" y="4751322"/>
+            <a:ext cx="487362" cy="487363"/>
+          </a:xfrm>
+          <a:prstGeom prst="rect">
+            <a:avLst/>
+          </a:prstGeom>
+        </p:spPr>
+      </p:pic>
+      <p:pic>
+        <p:nvPicPr>
+          <p:cNvPr id="10" name="laugh">
+            <a:hlinkClick r:id="" action="ppaction://media"/>
+            <a:extLst>
+              <a:ext uri="{FF2B5EF4-FFF2-40B4-BE49-F238E27FC236}">
+                <a16:creationId xmlns:a16="http://schemas.microsoft.com/office/drawing/2014/main" id="{689CDE9D-7C8E-F1D0-3C20-E68183CBE46E}"/>
+              </a:ext>
+            </a:extLst>
+          </p:cNvPr>
+          <p:cNvPicPr>
+            <a:picLocks noChangeAspect="1"/>
+          </p:cNvPicPr>
+          <p:nvPr>
+            <a:audioFile r:link="rId4"/>
+            <p:extLst>
+              <p:ext uri="{DAA4B4D4-6D71-4841-9C94-3DE7FCFB9230}">
+                <p14:media xmlns:p14="http://schemas.microsoft.com/office/powerpoint/2010/main" r:embed="rId3"/>
+              </p:ext>
+            </p:extLst>
+          </p:nvPr>
+        </p:nvPicPr>
+        <p:blipFill>
+          <a:blip r:embed="rId12"/>
+          <a:stretch>
+            <a:fillRect/>
+          </a:stretch>
+        </p:blipFill>
+        <p:spPr>
+          <a:xfrm>
+            <a:off x="10836278" y="4751322"/>
+            <a:ext cx="487362" cy="487363"/>
+          </a:xfrm>
+          <a:prstGeom prst="rect">
+            <a:avLst/>
+          </a:prstGeom>
+        </p:spPr>
+      </p:pic>
+      <p:pic>
+        <p:nvPicPr>
+          <p:cNvPr id="11" name="breath">
+            <a:hlinkClick r:id="" action="ppaction://media"/>
+            <a:extLst>
+              <a:ext uri="{FF2B5EF4-FFF2-40B4-BE49-F238E27FC236}">
+                <a16:creationId xmlns:a16="http://schemas.microsoft.com/office/drawing/2014/main" id="{68FB7D34-0D5B-6405-8845-DD42F0D59079}"/>
+              </a:ext>
+            </a:extLst>
+          </p:cNvPr>
+          <p:cNvPicPr>
+            <a:picLocks noChangeAspect="1"/>
+          </p:cNvPicPr>
+          <p:nvPr>
+            <a:audioFile r:link="rId6"/>
+            <p:extLst>
+              <p:ext uri="{DAA4B4D4-6D71-4841-9C94-3DE7FCFB9230}">
+                <p14:media xmlns:p14="http://schemas.microsoft.com/office/powerpoint/2010/main" r:embed="rId5"/>
+              </p:ext>
+            </p:extLst>
+          </p:nvPr>
+        </p:nvPicPr>
+        <p:blipFill>
+          <a:blip r:embed="rId12"/>
+          <a:stretch>
+            <a:fillRect/>
+          </a:stretch>
+        </p:blipFill>
+        <p:spPr>
+          <a:xfrm>
+            <a:off x="6477000" y="4751323"/>
+            <a:ext cx="487362" cy="487363"/>
+          </a:xfrm>
+          <a:prstGeom prst="rect">
+            <a:avLst/>
+          </a:prstGeom>
+        </p:spPr>
+      </p:pic>
+      <p:pic>
+        <p:nvPicPr>
+          <p:cNvPr id="13" name="sniff">
+            <a:hlinkClick r:id="" action="ppaction://media"/>
+            <a:extLst>
+              <a:ext uri="{FF2B5EF4-FFF2-40B4-BE49-F238E27FC236}">
+                <a16:creationId xmlns:a16="http://schemas.microsoft.com/office/drawing/2014/main" id="{D9C28E88-6C4A-6ECA-F401-FBA81C031275}"/>
+              </a:ext>
+            </a:extLst>
+          </p:cNvPr>
+          <p:cNvPicPr>
+            <a:picLocks noChangeAspect="1"/>
+          </p:cNvPicPr>
+          <p:nvPr>
+            <a:audioFile r:link="rId8"/>
+            <p:extLst>
+              <p:ext uri="{DAA4B4D4-6D71-4841-9C94-3DE7FCFB9230}">
+                <p14:media xmlns:p14="http://schemas.microsoft.com/office/powerpoint/2010/main" r:embed="rId7"/>
+              </p:ext>
+            </p:extLst>
+          </p:nvPr>
+        </p:nvPicPr>
+        <p:blipFill>
+          <a:blip r:embed="rId12"/>
+          <a:stretch>
+            <a:fillRect/>
+          </a:stretch>
+        </p:blipFill>
+        <p:spPr>
+          <a:xfrm>
+            <a:off x="15082669" y="4788558"/>
+            <a:ext cx="487362" cy="487363"/>
+          </a:xfrm>
+          <a:prstGeom prst="rect">
+            <a:avLst/>
+          </a:prstGeom>
+        </p:spPr>
+      </p:pic>
+      <p:sp>
+        <p:nvSpPr>
+          <p:cNvPr id="14" name="TextBox 13">
+            <a:extLst>
+              <a:ext uri="{FF2B5EF4-FFF2-40B4-BE49-F238E27FC236}">
+                <a16:creationId xmlns:a16="http://schemas.microsoft.com/office/drawing/2014/main" id="{A6A1524B-2A69-26FE-9534-72C57E395058}"/>
+              </a:ext>
+            </a:extLst>
+          </p:cNvPr>
+          <p:cNvSpPr txBox="1"/>
+          <p:nvPr/>
+        </p:nvSpPr>
+        <p:spPr>
+          <a:xfrm>
+            <a:off x="1489435" y="5656082"/>
+            <a:ext cx="2777765" cy="923330"/>
+          </a:xfrm>
+          <a:prstGeom prst="rect">
+            <a:avLst/>
+          </a:prstGeom>
+          <a:noFill/>
+        </p:spPr>
+        <p:txBody>
+          <a:bodyPr wrap="square" rtlCol="0">
+            <a:spAutoFit/>
+          </a:bodyPr>
+          <a:lstStyle/>
+          <a:p>
+            <a:r>
+              <a:rPr lang="en-US" dirty="0"/>
+              <a:t>[Throat clear] </a:t>
+            </a:r>
+            <a:r>
+              <a:rPr lang="en-US" dirty="0" err="1"/>
+              <a:t>ờm</a:t>
+            </a:r>
+            <a:r>
+              <a:rPr lang="en-US" dirty="0"/>
+              <a:t>, </a:t>
+            </a:r>
+            <a:r>
+              <a:rPr lang="en-US" dirty="0" err="1"/>
+              <a:t>tôi</a:t>
+            </a:r>
+            <a:r>
+              <a:rPr lang="en-US" dirty="0"/>
+              <a:t> </a:t>
+            </a:r>
+            <a:r>
+              <a:rPr lang="en-US" dirty="0" err="1"/>
+              <a:t>có</a:t>
+            </a:r>
+            <a:r>
+              <a:rPr lang="en-US" dirty="0"/>
+              <a:t> </a:t>
+            </a:r>
+            <a:r>
+              <a:rPr lang="en-US" dirty="0" err="1"/>
+              <a:t>chuyện</a:t>
+            </a:r>
+            <a:r>
+              <a:rPr lang="en-US" dirty="0"/>
+              <a:t> </a:t>
+            </a:r>
+            <a:r>
+              <a:rPr lang="en-US" dirty="0" err="1"/>
+              <a:t>này</a:t>
+            </a:r>
+            <a:r>
+              <a:rPr lang="en-US" dirty="0"/>
+              <a:t> </a:t>
+            </a:r>
+            <a:r>
+              <a:rPr lang="en-US" dirty="0" err="1"/>
+              <a:t>muốn</a:t>
+            </a:r>
+            <a:r>
+              <a:rPr lang="en-US" dirty="0"/>
+              <a:t> </a:t>
+            </a:r>
+            <a:r>
+              <a:rPr lang="en-US" dirty="0" err="1"/>
+              <a:t>nói</a:t>
+            </a:r>
+            <a:r>
+              <a:rPr lang="en-US" dirty="0"/>
+              <a:t> </a:t>
+            </a:r>
+            <a:r>
+              <a:rPr lang="en-US" dirty="0" err="1"/>
+              <a:t>với</a:t>
+            </a:r>
+            <a:r>
+              <a:rPr lang="en-US" dirty="0"/>
+              <a:t> </a:t>
+            </a:r>
+            <a:r>
+              <a:rPr lang="en-US" dirty="0" err="1"/>
+              <a:t>bạn</a:t>
+            </a:r>
+            <a:r>
+              <a:rPr lang="en-US" dirty="0"/>
+              <a:t> </a:t>
+            </a:r>
+            <a:r>
+              <a:rPr lang="en-US" dirty="0" err="1"/>
+              <a:t>nhưng</a:t>
+            </a:r>
+            <a:r>
+              <a:rPr lang="en-US" dirty="0"/>
+              <a:t> </a:t>
+            </a:r>
+            <a:r>
+              <a:rPr lang="en-US" dirty="0" err="1"/>
+              <a:t>hơi</a:t>
+            </a:r>
+            <a:r>
+              <a:rPr lang="en-US" dirty="0"/>
+              <a:t> </a:t>
+            </a:r>
+            <a:r>
+              <a:rPr lang="en-US" dirty="0" err="1"/>
+              <a:t>ngại</a:t>
+            </a:r>
+            <a:endParaRPr lang="en-US" dirty="0"/>
+          </a:p>
+        </p:txBody>
+      </p:sp>
+      <p:sp>
+        <p:nvSpPr>
+          <p:cNvPr id="16" name="TextBox 15">
+            <a:extLst>
+              <a:ext uri="{FF2B5EF4-FFF2-40B4-BE49-F238E27FC236}">
+                <a16:creationId xmlns:a16="http://schemas.microsoft.com/office/drawing/2014/main" id="{353DE579-CEEA-531F-8EF2-6096DDB32EEA}"/>
+              </a:ext>
+            </a:extLst>
+          </p:cNvPr>
+          <p:cNvSpPr txBox="1"/>
+          <p:nvPr/>
+        </p:nvSpPr>
+        <p:spPr>
+          <a:xfrm>
+            <a:off x="5331798" y="5580687"/>
+            <a:ext cx="2777765" cy="1200329"/>
+          </a:xfrm>
+          <a:prstGeom prst="rect">
+            <a:avLst/>
+          </a:prstGeom>
+          <a:noFill/>
+        </p:spPr>
+        <p:txBody>
+          <a:bodyPr wrap="square" rtlCol="0">
+            <a:spAutoFit/>
+          </a:bodyPr>
+          <a:lstStyle/>
+          <a:p>
+            <a:r>
+              <a:rPr lang="en-US" dirty="0" err="1"/>
+              <a:t>Hôm</a:t>
+            </a:r>
+            <a:r>
+              <a:rPr lang="en-US" dirty="0"/>
+              <a:t> qua </a:t>
+            </a:r>
+            <a:r>
+              <a:rPr lang="en-US" dirty="0" err="1"/>
+              <a:t>tôi</a:t>
+            </a:r>
+            <a:r>
+              <a:rPr lang="en-US" dirty="0"/>
+              <a:t> </a:t>
+            </a:r>
+            <a:r>
+              <a:rPr lang="en-US" dirty="0" err="1"/>
+              <a:t>gặp</a:t>
+            </a:r>
+            <a:r>
+              <a:rPr lang="en-US" dirty="0"/>
+              <a:t> con </a:t>
+            </a:r>
+            <a:r>
+              <a:rPr lang="en-US" dirty="0" err="1"/>
+              <a:t>chó</a:t>
+            </a:r>
+            <a:r>
+              <a:rPr lang="en-US" dirty="0"/>
+              <a:t> to </a:t>
+            </a:r>
+            <a:r>
+              <a:rPr lang="en-US" dirty="0" err="1"/>
+              <a:t>quá</a:t>
+            </a:r>
+            <a:r>
+              <a:rPr lang="en-US" dirty="0"/>
+              <a:t> [breath] </a:t>
+            </a:r>
+            <a:r>
+              <a:rPr lang="en-US" dirty="0" err="1"/>
+              <a:t>tôi</a:t>
+            </a:r>
+            <a:r>
+              <a:rPr lang="en-US" dirty="0"/>
+              <a:t> </a:t>
+            </a:r>
+            <a:r>
+              <a:rPr lang="en-US" dirty="0" err="1"/>
+              <a:t>sợ</a:t>
+            </a:r>
+            <a:r>
+              <a:rPr lang="en-US" dirty="0"/>
+              <a:t> </a:t>
+            </a:r>
+            <a:r>
+              <a:rPr lang="en-US" dirty="0" err="1"/>
+              <a:t>quá</a:t>
+            </a:r>
+            <a:r>
+              <a:rPr lang="en-US" dirty="0"/>
+              <a:t> </a:t>
+            </a:r>
+            <a:r>
+              <a:rPr lang="en-US" dirty="0" err="1"/>
+              <a:t>chạy</a:t>
+            </a:r>
+            <a:r>
+              <a:rPr lang="en-US" dirty="0"/>
+              <a:t> </a:t>
+            </a:r>
+            <a:r>
+              <a:rPr lang="en-US" dirty="0" err="1"/>
+              <a:t>thẳng</a:t>
+            </a:r>
+            <a:r>
+              <a:rPr lang="en-US" dirty="0"/>
+              <a:t> </a:t>
+            </a:r>
+            <a:r>
+              <a:rPr lang="en-US" dirty="0" err="1"/>
+              <a:t>một</a:t>
+            </a:r>
+            <a:r>
+              <a:rPr lang="en-US" dirty="0"/>
+              <a:t> </a:t>
+            </a:r>
+            <a:r>
+              <a:rPr lang="en-US" dirty="0" err="1"/>
+              <a:t>mạch</a:t>
+            </a:r>
+            <a:r>
+              <a:rPr lang="en-US" dirty="0"/>
+              <a:t> </a:t>
+            </a:r>
+            <a:r>
+              <a:rPr lang="en-US" dirty="0" err="1"/>
+              <a:t>về</a:t>
+            </a:r>
+            <a:r>
+              <a:rPr lang="en-US" dirty="0"/>
+              <a:t> </a:t>
+            </a:r>
+            <a:r>
+              <a:rPr lang="en-US" dirty="0" err="1"/>
+              <a:t>nhà</a:t>
+            </a:r>
+            <a:endParaRPr lang="en-US" dirty="0"/>
+          </a:p>
+        </p:txBody>
+      </p:sp>
+      <p:sp>
+        <p:nvSpPr>
+          <p:cNvPr id="18" name="TextBox 17">
+            <a:extLst>
+              <a:ext uri="{FF2B5EF4-FFF2-40B4-BE49-F238E27FC236}">
+                <a16:creationId xmlns:a16="http://schemas.microsoft.com/office/drawing/2014/main" id="{EEA10C7F-FD0C-6D09-09B1-5D11D59FFAAF}"/>
+              </a:ext>
+            </a:extLst>
+          </p:cNvPr>
+          <p:cNvSpPr txBox="1"/>
+          <p:nvPr/>
+        </p:nvSpPr>
+        <p:spPr>
+          <a:xfrm>
+            <a:off x="9691076" y="5563526"/>
+            <a:ext cx="2777765" cy="923330"/>
+          </a:xfrm>
+          <a:prstGeom prst="rect">
+            <a:avLst/>
+          </a:prstGeom>
+          <a:noFill/>
+        </p:spPr>
+        <p:txBody>
+          <a:bodyPr wrap="square" rtlCol="0">
+            <a:spAutoFit/>
+          </a:bodyPr>
+          <a:lstStyle/>
+          <a:p>
+            <a:r>
+              <a:rPr lang="en-US" dirty="0"/>
+              <a:t>[Laughter] </a:t>
+            </a:r>
+            <a:r>
+              <a:rPr lang="en-US" dirty="0" err="1"/>
+              <a:t>cậu</a:t>
+            </a:r>
+            <a:r>
+              <a:rPr lang="en-US" dirty="0"/>
+              <a:t> </a:t>
+            </a:r>
+            <a:r>
+              <a:rPr lang="en-US" dirty="0" err="1"/>
+              <a:t>kể</a:t>
+            </a:r>
+            <a:r>
+              <a:rPr lang="en-US" dirty="0"/>
+              <a:t> </a:t>
+            </a:r>
+            <a:r>
+              <a:rPr lang="en-US" dirty="0" err="1"/>
+              <a:t>chuyện</a:t>
+            </a:r>
+            <a:r>
+              <a:rPr lang="en-US" dirty="0"/>
+              <a:t> </a:t>
+            </a:r>
+            <a:r>
+              <a:rPr lang="en-US" dirty="0" err="1"/>
+              <a:t>gì</a:t>
+            </a:r>
+            <a:r>
+              <a:rPr lang="en-US" dirty="0"/>
+              <a:t> </a:t>
+            </a:r>
+            <a:r>
+              <a:rPr lang="en-US" dirty="0" err="1"/>
+              <a:t>mà</a:t>
+            </a:r>
+            <a:r>
+              <a:rPr lang="en-US" dirty="0"/>
+              <a:t> </a:t>
+            </a:r>
+            <a:r>
+              <a:rPr lang="en-US" dirty="0" err="1"/>
+              <a:t>buồn</a:t>
+            </a:r>
+            <a:r>
+              <a:rPr lang="en-US" dirty="0"/>
+              <a:t> </a:t>
+            </a:r>
+            <a:r>
+              <a:rPr lang="en-US" dirty="0" err="1"/>
+              <a:t>cười</a:t>
+            </a:r>
+            <a:r>
+              <a:rPr lang="en-US" dirty="0"/>
+              <a:t> </a:t>
+            </a:r>
+            <a:r>
+              <a:rPr lang="en-US" dirty="0" err="1"/>
+              <a:t>thế</a:t>
+            </a:r>
+            <a:r>
+              <a:rPr lang="en-US" dirty="0"/>
+              <a:t> </a:t>
+            </a:r>
+            <a:r>
+              <a:rPr lang="en-US" dirty="0" err="1"/>
+              <a:t>làm</a:t>
+            </a:r>
+            <a:r>
+              <a:rPr lang="en-US" dirty="0"/>
+              <a:t> </a:t>
+            </a:r>
+            <a:r>
+              <a:rPr lang="en-US" dirty="0" err="1"/>
+              <a:t>tôi</a:t>
+            </a:r>
+            <a:r>
+              <a:rPr lang="en-US" dirty="0"/>
+              <a:t> </a:t>
+            </a:r>
+            <a:r>
+              <a:rPr lang="en-US" dirty="0" err="1"/>
+              <a:t>cười</a:t>
+            </a:r>
+            <a:r>
+              <a:rPr lang="en-US" dirty="0"/>
+              <a:t> </a:t>
+            </a:r>
+            <a:r>
+              <a:rPr lang="en-US" dirty="0" err="1"/>
+              <a:t>đau</a:t>
+            </a:r>
+            <a:r>
+              <a:rPr lang="en-US" dirty="0"/>
+              <a:t> </a:t>
+            </a:r>
+            <a:r>
+              <a:rPr lang="en-US" dirty="0" err="1"/>
+              <a:t>cả</a:t>
+            </a:r>
+            <a:r>
+              <a:rPr lang="en-US" dirty="0"/>
+              <a:t> </a:t>
+            </a:r>
+            <a:r>
+              <a:rPr lang="en-US" dirty="0" err="1"/>
+              <a:t>bụng</a:t>
+            </a:r>
+            <a:endParaRPr lang="en-US" dirty="0"/>
+          </a:p>
+        </p:txBody>
+      </p:sp>
+      <p:sp>
+        <p:nvSpPr>
+          <p:cNvPr id="20" name="TextBox 19">
+            <a:extLst>
+              <a:ext uri="{FF2B5EF4-FFF2-40B4-BE49-F238E27FC236}">
+                <a16:creationId xmlns:a16="http://schemas.microsoft.com/office/drawing/2014/main" id="{BADB4854-D9F8-6B1D-CED9-E447194A0DA2}"/>
+              </a:ext>
+            </a:extLst>
+          </p:cNvPr>
+          <p:cNvSpPr txBox="1"/>
+          <p:nvPr/>
+        </p:nvSpPr>
+        <p:spPr>
+          <a:xfrm>
+            <a:off x="13937467" y="5563526"/>
+            <a:ext cx="2777765" cy="923330"/>
+          </a:xfrm>
+          <a:prstGeom prst="rect">
+            <a:avLst/>
+          </a:prstGeom>
+          <a:noFill/>
+        </p:spPr>
+        <p:txBody>
+          <a:bodyPr wrap="square" rtlCol="0">
+            <a:spAutoFit/>
+          </a:bodyPr>
+          <a:lstStyle/>
+          <a:p>
+            <a:r>
+              <a:rPr lang="en-US" dirty="0" err="1"/>
+              <a:t>Cảm</a:t>
+            </a:r>
+            <a:r>
+              <a:rPr lang="en-US" dirty="0"/>
+              <a:t> </a:t>
+            </a:r>
+            <a:r>
+              <a:rPr lang="en-US" dirty="0" err="1"/>
+              <a:t>ơn</a:t>
+            </a:r>
+            <a:r>
+              <a:rPr lang="en-US" dirty="0"/>
+              <a:t> </a:t>
+            </a:r>
+            <a:r>
+              <a:rPr lang="en-US" dirty="0" err="1"/>
+              <a:t>ông</a:t>
+            </a:r>
+            <a:r>
+              <a:rPr lang="en-US" dirty="0"/>
+              <a:t> </a:t>
+            </a:r>
+            <a:r>
+              <a:rPr lang="en-US" dirty="0" err="1"/>
+              <a:t>trời</a:t>
+            </a:r>
+            <a:r>
+              <a:rPr lang="en-US" dirty="0"/>
+              <a:t> [sniff] </a:t>
+            </a:r>
+            <a:r>
+              <a:rPr lang="en-US" dirty="0" err="1"/>
+              <a:t>cuối</a:t>
+            </a:r>
+            <a:r>
+              <a:rPr lang="en-US" dirty="0"/>
+              <a:t> </a:t>
+            </a:r>
+            <a:r>
+              <a:rPr lang="en-US" dirty="0" err="1"/>
+              <a:t>cùng</a:t>
+            </a:r>
+            <a:r>
+              <a:rPr lang="en-US" dirty="0"/>
+              <a:t> </a:t>
+            </a:r>
+            <a:r>
+              <a:rPr lang="en-US" dirty="0" err="1"/>
+              <a:t>tôi</a:t>
+            </a:r>
+            <a:r>
+              <a:rPr lang="en-US" dirty="0"/>
+              <a:t> </a:t>
+            </a:r>
+            <a:r>
+              <a:rPr lang="en-US" dirty="0" err="1"/>
+              <a:t>cũng</a:t>
+            </a:r>
+            <a:r>
+              <a:rPr lang="en-US" dirty="0"/>
+              <a:t> </a:t>
+            </a:r>
+            <a:r>
+              <a:rPr lang="en-US" dirty="0" err="1"/>
+              <a:t>tìm</a:t>
+            </a:r>
+            <a:r>
+              <a:rPr lang="en-US" dirty="0"/>
+              <a:t> </a:t>
+            </a:r>
+            <a:r>
+              <a:rPr lang="en-US" dirty="0" err="1"/>
+              <a:t>được</a:t>
+            </a:r>
+            <a:r>
+              <a:rPr lang="en-US" dirty="0"/>
+              <a:t> </a:t>
+            </a:r>
+            <a:r>
+              <a:rPr lang="en-US" dirty="0" err="1"/>
+              <a:t>chìa</a:t>
+            </a:r>
+            <a:r>
+              <a:rPr lang="en-US" dirty="0"/>
+              <a:t> </a:t>
+            </a:r>
+            <a:r>
+              <a:rPr lang="en-US" dirty="0" err="1"/>
+              <a:t>khóa</a:t>
+            </a:r>
+            <a:r>
+              <a:rPr lang="en-US" dirty="0"/>
+              <a:t> </a:t>
+            </a:r>
+            <a:r>
+              <a:rPr lang="en-US" dirty="0" err="1"/>
+              <a:t>nhà</a:t>
+            </a:r>
+            <a:endParaRPr lang="en-US" dirty="0"/>
           </a:p>
         </p:txBody>
       </p:sp>
     </p:spTree>
+    <p:extLst>
+      <p:ext uri="{BB962C8B-B14F-4D97-AF65-F5344CB8AC3E}">
+        <p14:creationId xmlns:p14="http://schemas.microsoft.com/office/powerpoint/2010/main" val="1088661612"/>
+      </p:ext>
+    </p:extLst>
+  </p:cSld>
+  <p:clrMapOvr>
+    <a:masterClrMapping/>
+  </p:clrMapOvr>
+  <p:timing>
+    <p:tnLst>
+      <p:par>
+        <p:cTn id="1" dur="indefinite" restart="never" nodeType="tmRoot">
+          <p:childTnLst>
+            <p:seq concurrent="1" nextAc="seek">
+              <p:cTn id="2" dur="indefinite" nodeType="mainSeq">
+                <p:childTnLst>
+                  <p:par>
+                    <p:cTn id="3" fill="hold">
+                      <p:stCondLst>
+                        <p:cond delay="indefinite"/>
+                      </p:stCondLst>
+                      <p:childTnLst>
+                        <p:par>
+                          <p:cTn id="4" fill="hold">
+                            <p:stCondLst>
+                              <p:cond delay="0"/>
+                            </p:stCondLst>
+                            <p:childTnLst>
+                              <p:par>
+                                <p:cTn id="5" presetID="1" presetClass="mediacall" presetSubtype="0" fill="hold" nodeType="clickEffect">
+                                  <p:stCondLst>
+                                    <p:cond delay="0"/>
+                                  </p:stCondLst>
+                                  <p:childTnLst>
+                                    <p:cmd type="call" cmd="playFrom(0.0)">
+                                      <p:cBhvr>
+                                        <p:cTn id="6" dur="3980" fill="hold"/>
+                                        <p:tgtEl>
+                                          <p:spTgt spid="9"/>
+                                        </p:tgtEl>
+                                      </p:cBhvr>
+                                    </p:cmd>
+                                  </p:childTnLst>
+                                </p:cTn>
+                              </p:par>
+                            </p:childTnLst>
+                          </p:cTn>
+                        </p:par>
+                      </p:childTnLst>
+                    </p:cTn>
+                  </p:par>
+                  <p:par>
+                    <p:cTn id="7" fill="hold">
+                      <p:stCondLst>
+                        <p:cond delay="indefinite"/>
+                      </p:stCondLst>
+                      <p:childTnLst>
+                        <p:par>
+                          <p:cTn id="8" fill="hold">
+                            <p:stCondLst>
+                              <p:cond delay="0"/>
+                            </p:stCondLst>
+                            <p:childTnLst>
+                              <p:par>
+                                <p:cTn id="9" presetID="1" presetClass="mediacall" presetSubtype="0" fill="hold" nodeType="clickEffect">
+                                  <p:stCondLst>
+                                    <p:cond delay="0"/>
+                                  </p:stCondLst>
+                                  <p:childTnLst>
+                                    <p:cmd type="call" cmd="playFrom(0.0)">
+                                      <p:cBhvr>
+                                        <p:cTn id="10" dur="3780" fill="hold"/>
+                                        <p:tgtEl>
+                                          <p:spTgt spid="10"/>
+                                        </p:tgtEl>
+                                      </p:cBhvr>
+                                    </p:cmd>
+                                  </p:childTnLst>
+                                </p:cTn>
+                              </p:par>
+                            </p:childTnLst>
+                          </p:cTn>
+                        </p:par>
+                      </p:childTnLst>
+                    </p:cTn>
+                  </p:par>
+                  <p:par>
+                    <p:cTn id="11" fill="hold">
+                      <p:stCondLst>
+                        <p:cond delay="indefinite"/>
+                      </p:stCondLst>
+                      <p:childTnLst>
+                        <p:par>
+                          <p:cTn id="12" fill="hold">
+                            <p:stCondLst>
+                              <p:cond delay="0"/>
+                            </p:stCondLst>
+                            <p:childTnLst>
+                              <p:par>
+                                <p:cTn id="13" presetID="1" presetClass="mediacall" presetSubtype="0" fill="hold" nodeType="clickEffect">
+                                  <p:stCondLst>
+                                    <p:cond delay="0"/>
+                                  </p:stCondLst>
+                                  <p:childTnLst>
+                                    <p:cmd type="call" cmd="playFrom(0.0)">
+                                      <p:cBhvr>
+                                        <p:cTn id="14" dur="4390" fill="hold"/>
+                                        <p:tgtEl>
+                                          <p:spTgt spid="11"/>
+                                        </p:tgtEl>
+                                      </p:cBhvr>
+                                    </p:cmd>
+                                  </p:childTnLst>
+                                </p:cTn>
+                              </p:par>
+                            </p:childTnLst>
+                          </p:cTn>
+                        </p:par>
+                      </p:childTnLst>
+                    </p:cTn>
+                  </p:par>
+                  <p:par>
+                    <p:cTn id="15" fill="hold">
+                      <p:stCondLst>
+                        <p:cond delay="indefinite"/>
+                      </p:stCondLst>
+                      <p:childTnLst>
+                        <p:par>
+                          <p:cTn id="16" fill="hold">
+                            <p:stCondLst>
+                              <p:cond delay="0"/>
+                            </p:stCondLst>
+                            <p:childTnLst>
+                              <p:par>
+                                <p:cTn id="17" presetID="1" presetClass="mediacall" presetSubtype="0" fill="hold" nodeType="clickEffect">
+                                  <p:stCondLst>
+                                    <p:cond delay="0"/>
+                                  </p:stCondLst>
+                                  <p:childTnLst>
+                                    <p:cmd type="call" cmd="playFrom(0.0)">
+                                      <p:cBhvr>
+                                        <p:cTn id="18" dur="3660" fill="hold"/>
+                                        <p:tgtEl>
+                                          <p:spTgt spid="13"/>
+                                        </p:tgtEl>
+                                      </p:cBhvr>
+                                    </p:cmd>
+                                  </p:childTnLst>
+                                </p:cTn>
+                              </p:par>
+                            </p:childTnLst>
+                          </p:cTn>
+                        </p:par>
+                      </p:childTnLst>
+                    </p:cTn>
+                  </p:par>
+                </p:childTnLst>
+              </p:cTn>
+              <p:prevCondLst>
+                <p:cond evt="onPrev" delay="0">
+                  <p:tgtEl>
+                    <p:sldTgt/>
+                  </p:tgtEl>
+                </p:cond>
+              </p:prevCondLst>
+              <p:nextCondLst>
+                <p:cond evt="onNext" delay="0">
+                  <p:tgtEl>
+                    <p:sldTgt/>
+                  </p:tgtEl>
+                </p:cond>
+              </p:nextCondLst>
+            </p:seq>
+            <p:audio>
+              <p:cMediaNode vol="80000">
+                <p:cTn id="19" fill="hold" display="0">
+                  <p:stCondLst>
+                    <p:cond delay="indefinite"/>
+                  </p:stCondLst>
+                  <p:endCondLst>
+                    <p:cond evt="onStopAudio" delay="0">
+                      <p:tgtEl>
+                        <p:sldTgt/>
+                      </p:tgtEl>
+                    </p:cond>
+                  </p:endCondLst>
+                </p:cTn>
+                <p:tgtEl>
+                  <p:spTgt spid="9"/>
+                </p:tgtEl>
+              </p:cMediaNode>
+            </p:audio>
+            <p:audio>
+              <p:cMediaNode vol="80000">
+                <p:cTn id="20" fill="hold" display="0">
+                  <p:stCondLst>
+                    <p:cond delay="indefinite"/>
+                  </p:stCondLst>
+                  <p:endCondLst>
+                    <p:cond evt="onStopAudio" delay="0">
+                      <p:tgtEl>
+                        <p:sldTgt/>
+                      </p:tgtEl>
+                    </p:cond>
+                  </p:endCondLst>
+                </p:cTn>
+                <p:tgtEl>
+                  <p:spTgt spid="10"/>
+                </p:tgtEl>
+              </p:cMediaNode>
+            </p:audio>
+            <p:audio>
+              <p:cMediaNode vol="80000">
+                <p:cTn id="21" fill="hold" display="0">
+                  <p:stCondLst>
+                    <p:cond delay="indefinite"/>
+                  </p:stCondLst>
+                  <p:endCondLst>
+                    <p:cond evt="onStopAudio" delay="0">
+                      <p:tgtEl>
+                        <p:sldTgt/>
+                      </p:tgtEl>
+                    </p:cond>
+                  </p:endCondLst>
+                </p:cTn>
+                <p:tgtEl>
+                  <p:spTgt spid="11"/>
+                </p:tgtEl>
+              </p:cMediaNode>
+            </p:audio>
+            <p:audio>
+              <p:cMediaNode vol="80000">
+                <p:cTn id="22" fill="hold" display="0">
+                  <p:stCondLst>
+                    <p:cond delay="indefinite"/>
+                  </p:stCondLst>
+                  <p:endCondLst>
+                    <p:cond evt="onStopAudio" delay="0">
+                      <p:tgtEl>
+                        <p:sldTgt/>
+                      </p:tgtEl>
+                    </p:cond>
+                  </p:endCondLst>
+                </p:cTn>
+                <p:tgtEl>
+                  <p:spTgt spid="13"/>
+                </p:tgtEl>
+              </p:cMediaNode>
+            </p:audio>
+          </p:childTnLst>
+        </p:cTn>
+      </p:par>
+    </p:tnLst>
+  </p:timing>
+</p:sld>
+</file>
+
+<file path=ppt/slides/slide16.xml><?xml version="1.0" encoding="utf-8"?>
+<p:sld xmlns:a="http://schemas.openxmlformats.org/drawingml/2006/main" xmlns:r="http://schemas.openxmlformats.org/officeDocument/2006/relationships" xmlns:p="http://schemas.openxmlformats.org/presentationml/2006/main">
+  <p:cSld>
+    <p:spTree>
+      <p:nvGrpSpPr>
+        <p:cNvPr id="1" name="">
+          <a:extLst>
+            <a:ext uri="{FF2B5EF4-FFF2-40B4-BE49-F238E27FC236}">
+              <a16:creationId xmlns:a16="http://schemas.microsoft.com/office/drawing/2014/main" id="{2E82ECF2-237C-FBDB-B532-1B54220FB82C}"/>
+            </a:ext>
+          </a:extLst>
+        </p:cNvPr>
+        <p:cNvGrpSpPr/>
+        <p:nvPr/>
+      </p:nvGrpSpPr>
+      <p:grpSpPr>
+        <a:xfrm>
+          <a:off x="0" y="0"/>
+          <a:ext cx="0" cy="0"/>
+          <a:chOff x="0" y="0"/>
+          <a:chExt cx="0" cy="0"/>
+        </a:xfrm>
+      </p:grpSpPr>
+      <p:sp>
+        <p:nvSpPr>
+          <p:cNvPr id="2" name="Freeform 2">
+            <a:extLst>
+              <a:ext uri="{FF2B5EF4-FFF2-40B4-BE49-F238E27FC236}">
+                <a16:creationId xmlns:a16="http://schemas.microsoft.com/office/drawing/2014/main" id="{84451A41-C096-A89F-14BD-3DA454F5FBCF}"/>
+              </a:ext>
+            </a:extLst>
+          </p:cNvPr>
+          <p:cNvSpPr/>
+          <p:nvPr/>
+        </p:nvSpPr>
+        <p:spPr>
+          <a:xfrm>
+            <a:off x="0" y="9206494"/>
+            <a:ext cx="18288000" cy="1080508"/>
+          </a:xfrm>
+          <a:custGeom>
+            <a:avLst/>
+            <a:gdLst/>
+            <a:ahLst/>
+            <a:cxnLst/>
+            <a:rect l="l" t="t" r="r" b="b"/>
+            <a:pathLst>
+              <a:path w="18288000" h="1080508">
+                <a:moveTo>
+                  <a:pt x="0" y="0"/>
+                </a:moveTo>
+                <a:lnTo>
+                  <a:pt x="18288000" y="0"/>
+                </a:lnTo>
+                <a:lnTo>
+                  <a:pt x="18288000" y="1080508"/>
+                </a:lnTo>
+                <a:lnTo>
+                  <a:pt x="0" y="1080508"/>
+                </a:lnTo>
+                <a:lnTo>
+                  <a:pt x="0" y="0"/>
+                </a:lnTo>
+                <a:close/>
+              </a:path>
+            </a:pathLst>
+          </a:custGeom>
+          <a:blipFill>
+            <a:blip r:embed="rId2"/>
+            <a:stretch>
+              <a:fillRect l="-130" r="-130"/>
+            </a:stretch>
+          </a:blipFill>
+        </p:spPr>
+        <p:txBody>
+          <a:bodyPr/>
+          <a:lstStyle/>
+          <a:p>
+            <a:endParaRPr lang="en-VN"/>
+          </a:p>
+        </p:txBody>
+      </p:sp>
+      <p:sp>
+        <p:nvSpPr>
+          <p:cNvPr id="3" name="Freeform 3">
+            <a:extLst>
+              <a:ext uri="{FF2B5EF4-FFF2-40B4-BE49-F238E27FC236}">
+                <a16:creationId xmlns:a16="http://schemas.microsoft.com/office/drawing/2014/main" id="{7E6B25D6-8984-4D3B-4259-144957B24968}"/>
+              </a:ext>
+            </a:extLst>
+          </p:cNvPr>
+          <p:cNvSpPr/>
+          <p:nvPr/>
+        </p:nvSpPr>
+        <p:spPr>
+          <a:xfrm>
+            <a:off x="15326350" y="9512300"/>
+            <a:ext cx="1950428" cy="429520"/>
+          </a:xfrm>
+          <a:custGeom>
+            <a:avLst/>
+            <a:gdLst/>
+            <a:ahLst/>
+            <a:cxnLst/>
+            <a:rect l="l" t="t" r="r" b="b"/>
+            <a:pathLst>
+              <a:path w="1950428" h="429520">
+                <a:moveTo>
+                  <a:pt x="0" y="0"/>
+                </a:moveTo>
+                <a:lnTo>
+                  <a:pt x="1950428" y="0"/>
+                </a:lnTo>
+                <a:lnTo>
+                  <a:pt x="1950428" y="429520"/>
+                </a:lnTo>
+                <a:lnTo>
+                  <a:pt x="0" y="429520"/>
+                </a:lnTo>
+                <a:lnTo>
+                  <a:pt x="0" y="0"/>
+                </a:lnTo>
+                <a:close/>
+              </a:path>
+            </a:pathLst>
+          </a:custGeom>
+          <a:blipFill>
+            <a:blip r:embed="rId3"/>
+            <a:stretch>
+              <a:fillRect t="-240" b="-240"/>
+            </a:stretch>
+          </a:blipFill>
+        </p:spPr>
+        <p:txBody>
+          <a:bodyPr/>
+          <a:lstStyle/>
+          <a:p>
+            <a:endParaRPr lang="en-VN"/>
+          </a:p>
+        </p:txBody>
+      </p:sp>
+      <p:sp>
+        <p:nvSpPr>
+          <p:cNvPr id="4" name="Freeform 4">
+            <a:extLst>
+              <a:ext uri="{FF2B5EF4-FFF2-40B4-BE49-F238E27FC236}">
+                <a16:creationId xmlns:a16="http://schemas.microsoft.com/office/drawing/2014/main" id="{732EF181-3C1C-6F88-EFE0-0DFF958505C0}"/>
+              </a:ext>
+            </a:extLst>
+          </p:cNvPr>
+          <p:cNvSpPr/>
+          <p:nvPr/>
+        </p:nvSpPr>
+        <p:spPr>
+          <a:xfrm>
+            <a:off x="15326350" y="9512300"/>
+            <a:ext cx="1950428" cy="429520"/>
+          </a:xfrm>
+          <a:custGeom>
+            <a:avLst/>
+            <a:gdLst/>
+            <a:ahLst/>
+            <a:cxnLst/>
+            <a:rect l="l" t="t" r="r" b="b"/>
+            <a:pathLst>
+              <a:path w="1950428" h="429520">
+                <a:moveTo>
+                  <a:pt x="0" y="0"/>
+                </a:moveTo>
+                <a:lnTo>
+                  <a:pt x="1950428" y="0"/>
+                </a:lnTo>
+                <a:lnTo>
+                  <a:pt x="1950428" y="429520"/>
+                </a:lnTo>
+                <a:lnTo>
+                  <a:pt x="0" y="429520"/>
+                </a:lnTo>
+                <a:lnTo>
+                  <a:pt x="0" y="0"/>
+                </a:lnTo>
+                <a:close/>
+              </a:path>
+            </a:pathLst>
+          </a:custGeom>
+          <a:blipFill>
+            <a:blip r:embed="rId3"/>
+            <a:stretch>
+              <a:fillRect t="-240" b="-240"/>
+            </a:stretch>
+          </a:blipFill>
+        </p:spPr>
+        <p:txBody>
+          <a:bodyPr/>
+          <a:lstStyle/>
+          <a:p>
+            <a:endParaRPr lang="en-VN"/>
+          </a:p>
+        </p:txBody>
+      </p:sp>
+      <p:sp>
+        <p:nvSpPr>
+          <p:cNvPr id="5" name="TextBox 5">
+            <a:extLst>
+              <a:ext uri="{FF2B5EF4-FFF2-40B4-BE49-F238E27FC236}">
+                <a16:creationId xmlns:a16="http://schemas.microsoft.com/office/drawing/2014/main" id="{47F694EE-B3C9-2864-DEF4-A9BE210F92C0}"/>
+              </a:ext>
+            </a:extLst>
+          </p:cNvPr>
+          <p:cNvSpPr txBox="1"/>
+          <p:nvPr/>
+        </p:nvSpPr>
+        <p:spPr>
+          <a:xfrm>
+            <a:off x="840740" y="9548495"/>
+            <a:ext cx="7754620" cy="425917"/>
+          </a:xfrm>
+          <a:prstGeom prst="rect">
+            <a:avLst/>
+          </a:prstGeom>
+        </p:spPr>
+        <p:txBody>
+          <a:bodyPr lIns="0" tIns="0" rIns="0" bIns="0" rtlCol="0" anchor="t">
+            <a:spAutoFit/>
+          </a:bodyPr>
+          <a:lstStyle/>
+          <a:p>
+            <a:pPr algn="l">
+              <a:lnSpc>
+                <a:spcPts val="2520"/>
+              </a:lnSpc>
+            </a:pPr>
+            <a:r>
+              <a:rPr lang="en-US" sz="2100" spc="600">
+                <a:solidFill>
+                  <a:srgbClr val="B4B4B4"/>
+                </a:solidFill>
+                <a:latin typeface="Arimo"/>
+                <a:ea typeface="Arimo"/>
+                <a:cs typeface="Arimo"/>
+                <a:sym typeface="Arimo"/>
+              </a:rPr>
+              <a:t>www.viettel.com.vn</a:t>
+            </a:r>
+          </a:p>
+        </p:txBody>
+      </p:sp>
+      <p:sp>
+        <p:nvSpPr>
+          <p:cNvPr id="6" name="TextBox 6">
+            <a:extLst>
+              <a:ext uri="{FF2B5EF4-FFF2-40B4-BE49-F238E27FC236}">
+                <a16:creationId xmlns:a16="http://schemas.microsoft.com/office/drawing/2014/main" id="{1CF89BA5-0811-C0B1-26C9-99B8F844C37F}"/>
+              </a:ext>
+            </a:extLst>
+          </p:cNvPr>
+          <p:cNvSpPr txBox="1"/>
+          <p:nvPr/>
+        </p:nvSpPr>
+        <p:spPr>
+          <a:xfrm>
+            <a:off x="840740" y="9548495"/>
+            <a:ext cx="7754620" cy="425917"/>
+          </a:xfrm>
+          <a:prstGeom prst="rect">
+            <a:avLst/>
+          </a:prstGeom>
+        </p:spPr>
+        <p:txBody>
+          <a:bodyPr lIns="0" tIns="0" rIns="0" bIns="0" rtlCol="0" anchor="t">
+            <a:spAutoFit/>
+          </a:bodyPr>
+          <a:lstStyle/>
+          <a:p>
+            <a:pPr algn="l">
+              <a:lnSpc>
+                <a:spcPts val="2520"/>
+              </a:lnSpc>
+            </a:pPr>
+            <a:r>
+              <a:rPr lang="en-US" sz="2100" spc="600">
+                <a:solidFill>
+                  <a:srgbClr val="B4B4B4"/>
+                </a:solidFill>
+                <a:latin typeface="Arimo"/>
+                <a:ea typeface="Arimo"/>
+                <a:cs typeface="Arimo"/>
+                <a:sym typeface="Arimo"/>
+              </a:rPr>
+              <a:t>www.viettel.com.vn</a:t>
+            </a:r>
+          </a:p>
+        </p:txBody>
+      </p:sp>
+      <p:sp>
+        <p:nvSpPr>
+          <p:cNvPr id="7" name="TextBox 7">
+            <a:extLst>
+              <a:ext uri="{FF2B5EF4-FFF2-40B4-BE49-F238E27FC236}">
+                <a16:creationId xmlns:a16="http://schemas.microsoft.com/office/drawing/2014/main" id="{4FC781FA-4A7F-6D0F-433F-EFDB67E0A083}"/>
+              </a:ext>
+            </a:extLst>
+          </p:cNvPr>
+          <p:cNvSpPr txBox="1"/>
+          <p:nvPr/>
+        </p:nvSpPr>
+        <p:spPr>
+          <a:xfrm>
+            <a:off x="1024128" y="886968"/>
+            <a:ext cx="16248888" cy="1042416"/>
+          </a:xfrm>
+          <a:prstGeom prst="rect">
+            <a:avLst/>
+          </a:prstGeom>
+        </p:spPr>
+        <p:txBody>
+          <a:bodyPr lIns="0" tIns="0" rIns="0" bIns="0" rtlCol="0" anchor="t">
+            <a:spAutoFit/>
+          </a:bodyPr>
+          <a:lstStyle/>
+          <a:p>
+            <a:pPr algn="ctr">
+              <a:lnSpc>
+                <a:spcPts val="7880"/>
+              </a:lnSpc>
+            </a:pPr>
+            <a:r>
+              <a:rPr lang="en-US" sz="7577" dirty="0">
+                <a:solidFill>
+                  <a:srgbClr val="E80500"/>
+                </a:solidFill>
+                <a:latin typeface="Calistoga"/>
+                <a:ea typeface="Calistoga"/>
+                <a:cs typeface="Calistoga"/>
+                <a:sym typeface="Calistoga"/>
+              </a:rPr>
+              <a:t>Deployment</a:t>
+            </a:r>
+          </a:p>
+        </p:txBody>
+      </p:sp>
+      <p:sp>
+        <p:nvSpPr>
+          <p:cNvPr id="8" name="TextBox 8">
+            <a:extLst>
+              <a:ext uri="{FF2B5EF4-FFF2-40B4-BE49-F238E27FC236}">
+                <a16:creationId xmlns:a16="http://schemas.microsoft.com/office/drawing/2014/main" id="{EAE43332-3E00-F9BC-4E3D-D34B2DA92C8B}"/>
+              </a:ext>
+            </a:extLst>
+          </p:cNvPr>
+          <p:cNvSpPr txBox="1"/>
+          <p:nvPr/>
+        </p:nvSpPr>
+        <p:spPr>
+          <a:xfrm>
+            <a:off x="1024128" y="2240280"/>
+            <a:ext cx="16248888" cy="1030090"/>
+          </a:xfrm>
+          <a:prstGeom prst="rect">
+            <a:avLst/>
+          </a:prstGeom>
+        </p:spPr>
+        <p:txBody>
+          <a:bodyPr lIns="0" tIns="0" rIns="0" bIns="0" rtlCol="0" anchor="t">
+            <a:spAutoFit/>
+          </a:bodyPr>
+          <a:lstStyle/>
+          <a:p>
+            <a:pPr algn="l">
+              <a:lnSpc>
+                <a:spcPts val="4200"/>
+              </a:lnSpc>
+            </a:pPr>
+            <a:r>
+              <a:rPr lang="en-US" sz="3000" dirty="0">
+                <a:solidFill>
+                  <a:srgbClr val="000000"/>
+                </a:solidFill>
+                <a:latin typeface="Arimo"/>
+                <a:ea typeface="Arimo"/>
+                <a:cs typeface="Arimo"/>
+                <a:sym typeface="Arimo"/>
+              </a:rPr>
+              <a:t>We also test </a:t>
+            </a:r>
+            <a:r>
+              <a:rPr lang="en-US" sz="3000" dirty="0" err="1">
+                <a:solidFill>
+                  <a:srgbClr val="000000"/>
+                </a:solidFill>
+                <a:latin typeface="Arimo"/>
+                <a:ea typeface="Arimo"/>
+                <a:cs typeface="Arimo"/>
+                <a:sym typeface="Arimo"/>
+              </a:rPr>
+              <a:t>Omnivoice</a:t>
+            </a:r>
+            <a:r>
+              <a:rPr lang="en-US" sz="3000" dirty="0">
+                <a:solidFill>
+                  <a:srgbClr val="000000"/>
+                </a:solidFill>
+                <a:latin typeface="Arimo"/>
+                <a:ea typeface="Arimo"/>
+                <a:cs typeface="Arimo"/>
+                <a:sym typeface="Arimo"/>
+              </a:rPr>
+              <a:t> real time factor and memory utilization to confirm capability for deployment</a:t>
+            </a:r>
+          </a:p>
+        </p:txBody>
+      </p:sp>
+    </p:spTree>
+    <p:extLst>
+      <p:ext uri="{BB962C8B-B14F-4D97-AF65-F5344CB8AC3E}">
+        <p14:creationId xmlns:p14="http://schemas.microsoft.com/office/powerpoint/2010/main" val="3884252680"/>
+      </p:ext>
+    </p:extLst>
   </p:cSld>
   <p:clrMapOvr>
     <a:masterClrMapping/>
@@ -8275,7 +10196,473 @@
 </p:sld>
 </file>
 
-<file path=ppt/slides/slide2.xml><?xml version="1.0" encoding="utf-8"?>
+<file path=ppt/slides/slide17.xml><?xml version="1.0" encoding="utf-8"?>
+<p:sld xmlns:a="http://schemas.openxmlformats.org/drawingml/2006/main" xmlns:r="http://schemas.openxmlformats.org/officeDocument/2006/relationships" xmlns:p="http://schemas.openxmlformats.org/presentationml/2006/main">
+  <p:cSld>
+    <p:spTree>
+      <p:nvGrpSpPr>
+        <p:cNvPr id="1" name="">
+          <a:extLst>
+            <a:ext uri="{FF2B5EF4-FFF2-40B4-BE49-F238E27FC236}">
+              <a16:creationId xmlns:a16="http://schemas.microsoft.com/office/drawing/2014/main" id="{70C8945D-2544-AB44-1A6B-78C9AD7FBED8}"/>
+            </a:ext>
+          </a:extLst>
+        </p:cNvPr>
+        <p:cNvGrpSpPr/>
+        <p:nvPr/>
+      </p:nvGrpSpPr>
+      <p:grpSpPr>
+        <a:xfrm>
+          <a:off x="0" y="0"/>
+          <a:ext cx="0" cy="0"/>
+          <a:chOff x="0" y="0"/>
+          <a:chExt cx="0" cy="0"/>
+        </a:xfrm>
+      </p:grpSpPr>
+      <p:sp>
+        <p:nvSpPr>
+          <p:cNvPr id="2" name="Freeform 2">
+            <a:extLst>
+              <a:ext uri="{FF2B5EF4-FFF2-40B4-BE49-F238E27FC236}">
+                <a16:creationId xmlns:a16="http://schemas.microsoft.com/office/drawing/2014/main" id="{F113A96B-C848-ACA1-F519-D7E2197A028D}"/>
+              </a:ext>
+            </a:extLst>
+          </p:cNvPr>
+          <p:cNvSpPr/>
+          <p:nvPr/>
+        </p:nvSpPr>
+        <p:spPr>
+          <a:xfrm>
+            <a:off x="0" y="9206494"/>
+            <a:ext cx="18288000" cy="1080508"/>
+          </a:xfrm>
+          <a:custGeom>
+            <a:avLst/>
+            <a:gdLst/>
+            <a:ahLst/>
+            <a:cxnLst/>
+            <a:rect l="l" t="t" r="r" b="b"/>
+            <a:pathLst>
+              <a:path w="18288000" h="1080508">
+                <a:moveTo>
+                  <a:pt x="0" y="0"/>
+                </a:moveTo>
+                <a:lnTo>
+                  <a:pt x="18288000" y="0"/>
+                </a:lnTo>
+                <a:lnTo>
+                  <a:pt x="18288000" y="1080508"/>
+                </a:lnTo>
+                <a:lnTo>
+                  <a:pt x="0" y="1080508"/>
+                </a:lnTo>
+                <a:lnTo>
+                  <a:pt x="0" y="0"/>
+                </a:lnTo>
+                <a:close/>
+              </a:path>
+            </a:pathLst>
+          </a:custGeom>
+          <a:blipFill>
+            <a:blip r:embed="rId2"/>
+            <a:stretch>
+              <a:fillRect l="-130" r="-130"/>
+            </a:stretch>
+          </a:blipFill>
+        </p:spPr>
+        <p:txBody>
+          <a:bodyPr/>
+          <a:lstStyle/>
+          <a:p>
+            <a:endParaRPr lang="en-VN"/>
+          </a:p>
+        </p:txBody>
+      </p:sp>
+      <p:sp>
+        <p:nvSpPr>
+          <p:cNvPr id="3" name="Freeform 3">
+            <a:extLst>
+              <a:ext uri="{FF2B5EF4-FFF2-40B4-BE49-F238E27FC236}">
+                <a16:creationId xmlns:a16="http://schemas.microsoft.com/office/drawing/2014/main" id="{A2E2ADA9-7D0E-9BDC-08AC-A8D77A499EA4}"/>
+              </a:ext>
+            </a:extLst>
+          </p:cNvPr>
+          <p:cNvSpPr/>
+          <p:nvPr/>
+        </p:nvSpPr>
+        <p:spPr>
+          <a:xfrm>
+            <a:off x="15326350" y="9512300"/>
+            <a:ext cx="1950428" cy="429520"/>
+          </a:xfrm>
+          <a:custGeom>
+            <a:avLst/>
+            <a:gdLst/>
+            <a:ahLst/>
+            <a:cxnLst/>
+            <a:rect l="l" t="t" r="r" b="b"/>
+            <a:pathLst>
+              <a:path w="1950428" h="429520">
+                <a:moveTo>
+                  <a:pt x="0" y="0"/>
+                </a:moveTo>
+                <a:lnTo>
+                  <a:pt x="1950428" y="0"/>
+                </a:lnTo>
+                <a:lnTo>
+                  <a:pt x="1950428" y="429520"/>
+                </a:lnTo>
+                <a:lnTo>
+                  <a:pt x="0" y="429520"/>
+                </a:lnTo>
+                <a:lnTo>
+                  <a:pt x="0" y="0"/>
+                </a:lnTo>
+                <a:close/>
+              </a:path>
+            </a:pathLst>
+          </a:custGeom>
+          <a:blipFill>
+            <a:blip r:embed="rId3"/>
+            <a:stretch>
+              <a:fillRect t="-240" b="-240"/>
+            </a:stretch>
+          </a:blipFill>
+        </p:spPr>
+        <p:txBody>
+          <a:bodyPr/>
+          <a:lstStyle/>
+          <a:p>
+            <a:endParaRPr lang="en-VN"/>
+          </a:p>
+        </p:txBody>
+      </p:sp>
+      <p:sp>
+        <p:nvSpPr>
+          <p:cNvPr id="4" name="Freeform 4">
+            <a:extLst>
+              <a:ext uri="{FF2B5EF4-FFF2-40B4-BE49-F238E27FC236}">
+                <a16:creationId xmlns:a16="http://schemas.microsoft.com/office/drawing/2014/main" id="{7210C451-3F07-BA0C-4D49-CEC64CD5571E}"/>
+              </a:ext>
+            </a:extLst>
+          </p:cNvPr>
+          <p:cNvSpPr/>
+          <p:nvPr/>
+        </p:nvSpPr>
+        <p:spPr>
+          <a:xfrm>
+            <a:off x="15326350" y="9512300"/>
+            <a:ext cx="1950428" cy="429520"/>
+          </a:xfrm>
+          <a:custGeom>
+            <a:avLst/>
+            <a:gdLst/>
+            <a:ahLst/>
+            <a:cxnLst/>
+            <a:rect l="l" t="t" r="r" b="b"/>
+            <a:pathLst>
+              <a:path w="1950428" h="429520">
+                <a:moveTo>
+                  <a:pt x="0" y="0"/>
+                </a:moveTo>
+                <a:lnTo>
+                  <a:pt x="1950428" y="0"/>
+                </a:lnTo>
+                <a:lnTo>
+                  <a:pt x="1950428" y="429520"/>
+                </a:lnTo>
+                <a:lnTo>
+                  <a:pt x="0" y="429520"/>
+                </a:lnTo>
+                <a:lnTo>
+                  <a:pt x="0" y="0"/>
+                </a:lnTo>
+                <a:close/>
+              </a:path>
+            </a:pathLst>
+          </a:custGeom>
+          <a:blipFill>
+            <a:blip r:embed="rId3"/>
+            <a:stretch>
+              <a:fillRect t="-240" b="-240"/>
+            </a:stretch>
+          </a:blipFill>
+        </p:spPr>
+        <p:txBody>
+          <a:bodyPr/>
+          <a:lstStyle/>
+          <a:p>
+            <a:endParaRPr lang="en-VN"/>
+          </a:p>
+        </p:txBody>
+      </p:sp>
+      <p:sp>
+        <p:nvSpPr>
+          <p:cNvPr id="5" name="TextBox 5">
+            <a:extLst>
+              <a:ext uri="{FF2B5EF4-FFF2-40B4-BE49-F238E27FC236}">
+                <a16:creationId xmlns:a16="http://schemas.microsoft.com/office/drawing/2014/main" id="{87F60372-3474-183B-64F8-C77F7AFAF986}"/>
+              </a:ext>
+            </a:extLst>
+          </p:cNvPr>
+          <p:cNvSpPr txBox="1"/>
+          <p:nvPr/>
+        </p:nvSpPr>
+        <p:spPr>
+          <a:xfrm>
+            <a:off x="840740" y="9548495"/>
+            <a:ext cx="7754620" cy="425917"/>
+          </a:xfrm>
+          <a:prstGeom prst="rect">
+            <a:avLst/>
+          </a:prstGeom>
+        </p:spPr>
+        <p:txBody>
+          <a:bodyPr lIns="0" tIns="0" rIns="0" bIns="0" rtlCol="0" anchor="t">
+            <a:spAutoFit/>
+          </a:bodyPr>
+          <a:lstStyle/>
+          <a:p>
+            <a:pPr algn="l">
+              <a:lnSpc>
+                <a:spcPts val="2520"/>
+              </a:lnSpc>
+            </a:pPr>
+            <a:r>
+              <a:rPr lang="en-US" sz="2100" spc="600">
+                <a:solidFill>
+                  <a:srgbClr val="B4B4B4"/>
+                </a:solidFill>
+                <a:latin typeface="Arimo"/>
+                <a:ea typeface="Arimo"/>
+                <a:cs typeface="Arimo"/>
+                <a:sym typeface="Arimo"/>
+              </a:rPr>
+              <a:t>www.viettel.com.vn</a:t>
+            </a:r>
+          </a:p>
+        </p:txBody>
+      </p:sp>
+      <p:sp>
+        <p:nvSpPr>
+          <p:cNvPr id="6" name="TextBox 6">
+            <a:extLst>
+              <a:ext uri="{FF2B5EF4-FFF2-40B4-BE49-F238E27FC236}">
+                <a16:creationId xmlns:a16="http://schemas.microsoft.com/office/drawing/2014/main" id="{4F0989CB-5A24-8AC0-A9D4-F255E99FCC40}"/>
+              </a:ext>
+            </a:extLst>
+          </p:cNvPr>
+          <p:cNvSpPr txBox="1"/>
+          <p:nvPr/>
+        </p:nvSpPr>
+        <p:spPr>
+          <a:xfrm>
+            <a:off x="840740" y="9548495"/>
+            <a:ext cx="7754620" cy="425917"/>
+          </a:xfrm>
+          <a:prstGeom prst="rect">
+            <a:avLst/>
+          </a:prstGeom>
+        </p:spPr>
+        <p:txBody>
+          <a:bodyPr lIns="0" tIns="0" rIns="0" bIns="0" rtlCol="0" anchor="t">
+            <a:spAutoFit/>
+          </a:bodyPr>
+          <a:lstStyle/>
+          <a:p>
+            <a:pPr algn="l">
+              <a:lnSpc>
+                <a:spcPts val="2520"/>
+              </a:lnSpc>
+            </a:pPr>
+            <a:r>
+              <a:rPr lang="en-US" sz="2100" spc="600">
+                <a:solidFill>
+                  <a:srgbClr val="B4B4B4"/>
+                </a:solidFill>
+                <a:latin typeface="Arimo"/>
+                <a:ea typeface="Arimo"/>
+                <a:cs typeface="Arimo"/>
+                <a:sym typeface="Arimo"/>
+              </a:rPr>
+              <a:t>www.viettel.com.vn</a:t>
+            </a:r>
+          </a:p>
+        </p:txBody>
+      </p:sp>
+      <p:sp>
+        <p:nvSpPr>
+          <p:cNvPr id="7" name="TextBox 7">
+            <a:extLst>
+              <a:ext uri="{FF2B5EF4-FFF2-40B4-BE49-F238E27FC236}">
+                <a16:creationId xmlns:a16="http://schemas.microsoft.com/office/drawing/2014/main" id="{8A0709FF-5AC5-1EEF-7ED2-D58C7F46AAD3}"/>
+              </a:ext>
+            </a:extLst>
+          </p:cNvPr>
+          <p:cNvSpPr txBox="1"/>
+          <p:nvPr/>
+        </p:nvSpPr>
+        <p:spPr>
+          <a:xfrm>
+            <a:off x="1024128" y="886968"/>
+            <a:ext cx="16248888" cy="1042416"/>
+          </a:xfrm>
+          <a:prstGeom prst="rect">
+            <a:avLst/>
+          </a:prstGeom>
+        </p:spPr>
+        <p:txBody>
+          <a:bodyPr lIns="0" tIns="0" rIns="0" bIns="0" rtlCol="0" anchor="t">
+            <a:spAutoFit/>
+          </a:bodyPr>
+          <a:lstStyle/>
+          <a:p>
+            <a:pPr algn="ctr">
+              <a:lnSpc>
+                <a:spcPts val="7880"/>
+              </a:lnSpc>
+            </a:pPr>
+            <a:r>
+              <a:rPr lang="en-US" sz="7577" dirty="0">
+                <a:solidFill>
+                  <a:srgbClr val="E80500"/>
+                </a:solidFill>
+                <a:latin typeface="Calistoga"/>
+                <a:ea typeface="Calistoga"/>
+                <a:cs typeface="Calistoga"/>
+                <a:sym typeface="Calistoga"/>
+              </a:rPr>
+              <a:t>Conclusion</a:t>
+            </a:r>
+          </a:p>
+        </p:txBody>
+      </p:sp>
+      <p:sp>
+        <p:nvSpPr>
+          <p:cNvPr id="8" name="TextBox 8">
+            <a:extLst>
+              <a:ext uri="{FF2B5EF4-FFF2-40B4-BE49-F238E27FC236}">
+                <a16:creationId xmlns:a16="http://schemas.microsoft.com/office/drawing/2014/main" id="{B9B01341-8752-4045-2B23-21BB7F8E2A23}"/>
+              </a:ext>
+            </a:extLst>
+          </p:cNvPr>
+          <p:cNvSpPr txBox="1"/>
+          <p:nvPr/>
+        </p:nvSpPr>
+        <p:spPr>
+          <a:xfrm>
+            <a:off x="1024128" y="2240280"/>
+            <a:ext cx="16248888" cy="2645917"/>
+          </a:xfrm>
+          <a:prstGeom prst="rect">
+            <a:avLst/>
+          </a:prstGeom>
+        </p:spPr>
+        <p:txBody>
+          <a:bodyPr lIns="0" tIns="0" rIns="0" bIns="0" rtlCol="0" anchor="t">
+            <a:spAutoFit/>
+          </a:bodyPr>
+          <a:lstStyle/>
+          <a:p>
+            <a:pPr marL="457200" indent="-457200" algn="l">
+              <a:lnSpc>
+                <a:spcPts val="4200"/>
+              </a:lnSpc>
+              <a:buFontTx/>
+              <a:buChar char="-"/>
+            </a:pPr>
+            <a:r>
+              <a:rPr lang="en-US" sz="3000" dirty="0">
+                <a:solidFill>
+                  <a:srgbClr val="000000"/>
+                </a:solidFill>
+                <a:latin typeface="Arimo"/>
+                <a:ea typeface="Arimo"/>
+                <a:cs typeface="Arimo"/>
+                <a:sym typeface="Arimo"/>
+              </a:rPr>
+              <a:t>Nonverbal element to enhance the naturalness of TTS system, suitable for expand our TTS and incorporate with agentic conversation</a:t>
+            </a:r>
+          </a:p>
+          <a:p>
+            <a:pPr marL="457200" indent="-457200" algn="l">
+              <a:lnSpc>
+                <a:spcPts val="4200"/>
+              </a:lnSpc>
+              <a:buFontTx/>
+              <a:buChar char="-"/>
+            </a:pPr>
+            <a:r>
+              <a:rPr lang="en-US" sz="3000" dirty="0">
+                <a:solidFill>
+                  <a:srgbClr val="000000"/>
+                </a:solidFill>
+                <a:latin typeface="Arimo"/>
+                <a:ea typeface="Arimo"/>
+                <a:cs typeface="Arimo"/>
+                <a:sym typeface="Arimo"/>
+              </a:rPr>
+              <a:t>Create a pipeline for automatically create TTS + NVV dataset</a:t>
+            </a:r>
+          </a:p>
+          <a:p>
+            <a:pPr marL="457200" indent="-457200" algn="l">
+              <a:lnSpc>
+                <a:spcPts val="4200"/>
+              </a:lnSpc>
+              <a:buFontTx/>
+              <a:buChar char="-"/>
+            </a:pPr>
+            <a:r>
+              <a:rPr lang="en-US" sz="3000" dirty="0">
+                <a:solidFill>
+                  <a:srgbClr val="000000"/>
+                </a:solidFill>
+                <a:latin typeface="Arimo"/>
+                <a:ea typeface="Arimo"/>
+                <a:cs typeface="Arimo"/>
+                <a:sym typeface="Arimo"/>
+              </a:rPr>
+              <a:t>Finetune a model to speak with NV element effectively</a:t>
+            </a:r>
+          </a:p>
+          <a:p>
+            <a:pPr marL="457200" indent="-457200" algn="l">
+              <a:lnSpc>
+                <a:spcPts val="4200"/>
+              </a:lnSpc>
+              <a:buFontTx/>
+              <a:buChar char="-"/>
+            </a:pPr>
+            <a:r>
+              <a:rPr lang="en-US" sz="3000" dirty="0">
+                <a:solidFill>
+                  <a:srgbClr val="000000"/>
+                </a:solidFill>
+                <a:latin typeface="Arimo"/>
+                <a:ea typeface="Arimo"/>
+                <a:cs typeface="Arimo"/>
+                <a:sym typeface="Arimo"/>
+              </a:rPr>
+              <a:t>Test our model on real server for deployment</a:t>
+            </a:r>
+          </a:p>
+        </p:txBody>
+      </p:sp>
+    </p:spTree>
+    <p:extLst>
+      <p:ext uri="{BB962C8B-B14F-4D97-AF65-F5344CB8AC3E}">
+        <p14:creationId xmlns:p14="http://schemas.microsoft.com/office/powerpoint/2010/main" val="3887805657"/>
+      </p:ext>
+    </p:extLst>
+  </p:cSld>
+  <p:clrMapOvr>
+    <a:masterClrMapping/>
+  </p:clrMapOvr>
+</p:sld>
+</file>
+
+<file path=ppt/slides/slide18.xml><?xml version="1.0" encoding="utf-8"?>
 <p:sld xmlns:a="http://schemas.openxmlformats.org/drawingml/2006/main" xmlns:r="http://schemas.openxmlformats.org/officeDocument/2006/relationships" xmlns:p="http://schemas.openxmlformats.org/presentationml/2006/main">
   <p:cSld>
     <p:bg>
@@ -8349,7 +10736,37 @@
           <a:bodyPr/>
           <a:lstStyle/>
           <a:p>
-            <a:endParaRPr lang="en-VN"/>
+            <a:pPr marL="0" marR="0" lvl="0" indent="0" algn="l" defTabSz="914400" rtl="0" eaLnBrk="1" fontAlgn="auto" latinLnBrk="0" hangingPunct="1">
+              <a:lnSpc>
+                <a:spcPct val="100000"/>
+              </a:lnSpc>
+              <a:spcBef>
+                <a:spcPts val="0"/>
+              </a:spcBef>
+              <a:spcAft>
+                <a:spcPts val="0"/>
+              </a:spcAft>
+              <a:buClrTx/>
+              <a:buSzTx/>
+              <a:buFontTx/>
+              <a:buNone/>
+              <a:tabLst/>
+              <a:defRPr/>
+            </a:pPr>
+            <a:endParaRPr kumimoji="0" lang="en-VN" sz="1800" b="0" i="0" u="none" strike="noStrike" kern="1200" cap="none" spc="0" normalizeH="0" baseline="0" noProof="0">
+              <a:ln>
+                <a:noFill/>
+              </a:ln>
+              <a:solidFill>
+                <a:prstClr val="black"/>
+              </a:solidFill>
+              <a:effectLst/>
+              <a:uLnTx/>
+              <a:uFillTx/>
+              <a:latin typeface="Calibri"/>
+              <a:ea typeface="+mn-ea"/>
+              <a:cs typeface="+mn-cs"/>
+            </a:endParaRPr>
           </a:p>
         </p:txBody>
       </p:sp>
@@ -8402,7 +10819,37 @@
           <a:bodyPr/>
           <a:lstStyle/>
           <a:p>
-            <a:endParaRPr lang="en-VN"/>
+            <a:pPr marL="0" marR="0" lvl="0" indent="0" algn="l" defTabSz="914400" rtl="0" eaLnBrk="1" fontAlgn="auto" latinLnBrk="0" hangingPunct="1">
+              <a:lnSpc>
+                <a:spcPct val="100000"/>
+              </a:lnSpc>
+              <a:spcBef>
+                <a:spcPts val="0"/>
+              </a:spcBef>
+              <a:spcAft>
+                <a:spcPts val="0"/>
+              </a:spcAft>
+              <a:buClrTx/>
+              <a:buSzTx/>
+              <a:buFontTx/>
+              <a:buNone/>
+              <a:tabLst/>
+              <a:defRPr/>
+            </a:pPr>
+            <a:endParaRPr kumimoji="0" lang="en-VN" sz="1800" b="0" i="0" u="none" strike="noStrike" kern="1200" cap="none" spc="0" normalizeH="0" baseline="0" noProof="0">
+              <a:ln>
+                <a:noFill/>
+              </a:ln>
+              <a:solidFill>
+                <a:prstClr val="black"/>
+              </a:solidFill>
+              <a:effectLst/>
+              <a:uLnTx/>
+              <a:uFillTx/>
+              <a:latin typeface="Calibri"/>
+              <a:ea typeface="+mn-ea"/>
+              <a:cs typeface="+mn-cs"/>
+            </a:endParaRPr>
           </a:p>
         </p:txBody>
       </p:sp>
@@ -8415,7 +10862,7 @@
         <p:spPr>
           <a:xfrm>
             <a:off x="1016858" y="4122746"/>
-            <a:ext cx="16242442" cy="1230630"/>
+            <a:ext cx="16242442" cy="1082412"/>
           </a:xfrm>
           <a:prstGeom prst="rect">
             <a:avLst/>
@@ -8427,27 +10874,560 @@
           </a:bodyPr>
           <a:lstStyle/>
           <a:p>
-            <a:pPr algn="ctr">
+            <a:pPr marL="0" marR="0" lvl="0" indent="0" algn="ctr" defTabSz="914400" rtl="0" eaLnBrk="1" fontAlgn="auto" latinLnBrk="0" hangingPunct="1">
               <a:lnSpc>
                 <a:spcPts val="8320"/>
               </a:lnSpc>
+              <a:spcBef>
+                <a:spcPts val="0"/>
+              </a:spcBef>
+              <a:spcAft>
+                <a:spcPts val="0"/>
+              </a:spcAft>
+              <a:buClrTx/>
+              <a:buSzTx/>
+              <a:buFontTx/>
+              <a:buNone/>
+              <a:tabLst/>
+              <a:defRPr/>
             </a:pPr>
             <a:r>
-              <a:rPr lang="en-US" sz="8000" dirty="0">
+              <a:rPr kumimoji="0" lang="en-US" sz="8000" b="0" i="0" u="none" strike="noStrike" kern="1200" cap="none" spc="0" normalizeH="0" baseline="0" noProof="0" dirty="0">
+                <a:ln>
+                  <a:noFill/>
+                </a:ln>
                 <a:solidFill>
                   <a:srgbClr val="FFFFFF"/>
                 </a:solidFill>
+                <a:effectLst/>
+                <a:uLnTx/>
+                <a:uFillTx/>
                 <a:latin typeface="Calistoga"/>
                 <a:ea typeface="Calistoga"/>
                 <a:cs typeface="Calistoga"/>
                 <a:sym typeface="Calistoga"/>
               </a:rPr>
-              <a:t>Method</a:t>
+              <a:t>Thank you</a:t>
             </a:r>
           </a:p>
         </p:txBody>
       </p:sp>
     </p:spTree>
+  </p:cSld>
+  <p:clrMapOvr>
+    <a:masterClrMapping/>
+  </p:clrMapOvr>
+</p:sld>
+</file>
+
+<file path=ppt/slides/slide2.xml><?xml version="1.0" encoding="utf-8"?>
+<p:sld xmlns:a="http://schemas.openxmlformats.org/drawingml/2006/main" xmlns:r="http://schemas.openxmlformats.org/officeDocument/2006/relationships" xmlns:p="http://schemas.openxmlformats.org/presentationml/2006/main">
+  <p:cSld>
+    <p:spTree>
+      <p:nvGrpSpPr>
+        <p:cNvPr id="1" name="">
+          <a:extLst>
+            <a:ext uri="{FF2B5EF4-FFF2-40B4-BE49-F238E27FC236}">
+              <a16:creationId xmlns:a16="http://schemas.microsoft.com/office/drawing/2014/main" id="{5160541C-4373-DE54-6DFE-D456FA5ABBB7}"/>
+            </a:ext>
+          </a:extLst>
+        </p:cNvPr>
+        <p:cNvGrpSpPr/>
+        <p:nvPr/>
+      </p:nvGrpSpPr>
+      <p:grpSpPr>
+        <a:xfrm>
+          <a:off x="0" y="0"/>
+          <a:ext cx="0" cy="0"/>
+          <a:chOff x="0" y="0"/>
+          <a:chExt cx="0" cy="0"/>
+        </a:xfrm>
+      </p:grpSpPr>
+      <p:sp>
+        <p:nvSpPr>
+          <p:cNvPr id="2" name="Freeform 2">
+            <a:extLst>
+              <a:ext uri="{FF2B5EF4-FFF2-40B4-BE49-F238E27FC236}">
+                <a16:creationId xmlns:a16="http://schemas.microsoft.com/office/drawing/2014/main" id="{7A917EB3-590B-6F14-EED3-64FAC1273A98}"/>
+              </a:ext>
+            </a:extLst>
+          </p:cNvPr>
+          <p:cNvSpPr/>
+          <p:nvPr/>
+        </p:nvSpPr>
+        <p:spPr>
+          <a:xfrm>
+            <a:off x="0" y="9206494"/>
+            <a:ext cx="18288000" cy="1080508"/>
+          </a:xfrm>
+          <a:custGeom>
+            <a:avLst/>
+            <a:gdLst/>
+            <a:ahLst/>
+            <a:cxnLst/>
+            <a:rect l="l" t="t" r="r" b="b"/>
+            <a:pathLst>
+              <a:path w="18288000" h="1080508">
+                <a:moveTo>
+                  <a:pt x="0" y="0"/>
+                </a:moveTo>
+                <a:lnTo>
+                  <a:pt x="18288000" y="0"/>
+                </a:lnTo>
+                <a:lnTo>
+                  <a:pt x="18288000" y="1080508"/>
+                </a:lnTo>
+                <a:lnTo>
+                  <a:pt x="0" y="1080508"/>
+                </a:lnTo>
+                <a:lnTo>
+                  <a:pt x="0" y="0"/>
+                </a:lnTo>
+                <a:close/>
+              </a:path>
+            </a:pathLst>
+          </a:custGeom>
+          <a:blipFill>
+            <a:blip r:embed="rId3"/>
+            <a:stretch>
+              <a:fillRect l="-130" r="-130"/>
+            </a:stretch>
+          </a:blipFill>
+        </p:spPr>
+        <p:txBody>
+          <a:bodyPr/>
+          <a:lstStyle/>
+          <a:p>
+            <a:endParaRPr lang="en-VN"/>
+          </a:p>
+        </p:txBody>
+      </p:sp>
+      <p:sp>
+        <p:nvSpPr>
+          <p:cNvPr id="3" name="Freeform 3">
+            <a:extLst>
+              <a:ext uri="{FF2B5EF4-FFF2-40B4-BE49-F238E27FC236}">
+                <a16:creationId xmlns:a16="http://schemas.microsoft.com/office/drawing/2014/main" id="{340A81D7-80F6-8090-BF10-5B249D612910}"/>
+              </a:ext>
+            </a:extLst>
+          </p:cNvPr>
+          <p:cNvSpPr/>
+          <p:nvPr/>
+        </p:nvSpPr>
+        <p:spPr>
+          <a:xfrm>
+            <a:off x="15326350" y="9512300"/>
+            <a:ext cx="1950428" cy="429520"/>
+          </a:xfrm>
+          <a:custGeom>
+            <a:avLst/>
+            <a:gdLst/>
+            <a:ahLst/>
+            <a:cxnLst/>
+            <a:rect l="l" t="t" r="r" b="b"/>
+            <a:pathLst>
+              <a:path w="1950428" h="429520">
+                <a:moveTo>
+                  <a:pt x="0" y="0"/>
+                </a:moveTo>
+                <a:lnTo>
+                  <a:pt x="1950428" y="0"/>
+                </a:lnTo>
+                <a:lnTo>
+                  <a:pt x="1950428" y="429520"/>
+                </a:lnTo>
+                <a:lnTo>
+                  <a:pt x="0" y="429520"/>
+                </a:lnTo>
+                <a:lnTo>
+                  <a:pt x="0" y="0"/>
+                </a:lnTo>
+                <a:close/>
+              </a:path>
+            </a:pathLst>
+          </a:custGeom>
+          <a:blipFill>
+            <a:blip r:embed="rId4"/>
+            <a:stretch>
+              <a:fillRect t="-240" b="-240"/>
+            </a:stretch>
+          </a:blipFill>
+        </p:spPr>
+        <p:txBody>
+          <a:bodyPr/>
+          <a:lstStyle/>
+          <a:p>
+            <a:endParaRPr lang="en-VN"/>
+          </a:p>
+        </p:txBody>
+      </p:sp>
+      <p:sp>
+        <p:nvSpPr>
+          <p:cNvPr id="4" name="Freeform 4">
+            <a:extLst>
+              <a:ext uri="{FF2B5EF4-FFF2-40B4-BE49-F238E27FC236}">
+                <a16:creationId xmlns:a16="http://schemas.microsoft.com/office/drawing/2014/main" id="{F292CA74-7FBA-9C9B-E517-E08A29AE5C72}"/>
+              </a:ext>
+            </a:extLst>
+          </p:cNvPr>
+          <p:cNvSpPr/>
+          <p:nvPr/>
+        </p:nvSpPr>
+        <p:spPr>
+          <a:xfrm>
+            <a:off x="15326350" y="9512300"/>
+            <a:ext cx="1950428" cy="429520"/>
+          </a:xfrm>
+          <a:custGeom>
+            <a:avLst/>
+            <a:gdLst/>
+            <a:ahLst/>
+            <a:cxnLst/>
+            <a:rect l="l" t="t" r="r" b="b"/>
+            <a:pathLst>
+              <a:path w="1950428" h="429520">
+                <a:moveTo>
+                  <a:pt x="0" y="0"/>
+                </a:moveTo>
+                <a:lnTo>
+                  <a:pt x="1950428" y="0"/>
+                </a:lnTo>
+                <a:lnTo>
+                  <a:pt x="1950428" y="429520"/>
+                </a:lnTo>
+                <a:lnTo>
+                  <a:pt x="0" y="429520"/>
+                </a:lnTo>
+                <a:lnTo>
+                  <a:pt x="0" y="0"/>
+                </a:lnTo>
+                <a:close/>
+              </a:path>
+            </a:pathLst>
+          </a:custGeom>
+          <a:blipFill>
+            <a:blip r:embed="rId4"/>
+            <a:stretch>
+              <a:fillRect t="-240" b="-240"/>
+            </a:stretch>
+          </a:blipFill>
+        </p:spPr>
+        <p:txBody>
+          <a:bodyPr/>
+          <a:lstStyle/>
+          <a:p>
+            <a:endParaRPr lang="en-VN"/>
+          </a:p>
+        </p:txBody>
+      </p:sp>
+      <p:sp>
+        <p:nvSpPr>
+          <p:cNvPr id="5" name="TextBox 5">
+            <a:extLst>
+              <a:ext uri="{FF2B5EF4-FFF2-40B4-BE49-F238E27FC236}">
+                <a16:creationId xmlns:a16="http://schemas.microsoft.com/office/drawing/2014/main" id="{BC634BE3-4C40-B836-622C-8A5259326E51}"/>
+              </a:ext>
+            </a:extLst>
+          </p:cNvPr>
+          <p:cNvSpPr txBox="1"/>
+          <p:nvPr/>
+        </p:nvSpPr>
+        <p:spPr>
+          <a:xfrm>
+            <a:off x="840740" y="9548495"/>
+            <a:ext cx="7754620" cy="425917"/>
+          </a:xfrm>
+          <a:prstGeom prst="rect">
+            <a:avLst/>
+          </a:prstGeom>
+        </p:spPr>
+        <p:txBody>
+          <a:bodyPr lIns="0" tIns="0" rIns="0" bIns="0" rtlCol="0" anchor="t">
+            <a:spAutoFit/>
+          </a:bodyPr>
+          <a:lstStyle/>
+          <a:p>
+            <a:pPr algn="l">
+              <a:lnSpc>
+                <a:spcPts val="2520"/>
+              </a:lnSpc>
+            </a:pPr>
+            <a:r>
+              <a:rPr lang="en-US" sz="2100" spc="600">
+                <a:solidFill>
+                  <a:srgbClr val="B4B4B4"/>
+                </a:solidFill>
+                <a:latin typeface="Arimo"/>
+                <a:ea typeface="Arimo"/>
+                <a:cs typeface="Arimo"/>
+                <a:sym typeface="Arimo"/>
+              </a:rPr>
+              <a:t>www.viettel.com.vn</a:t>
+            </a:r>
+          </a:p>
+        </p:txBody>
+      </p:sp>
+      <p:sp>
+        <p:nvSpPr>
+          <p:cNvPr id="6" name="TextBox 6">
+            <a:extLst>
+              <a:ext uri="{FF2B5EF4-FFF2-40B4-BE49-F238E27FC236}">
+                <a16:creationId xmlns:a16="http://schemas.microsoft.com/office/drawing/2014/main" id="{13F032DD-B9A4-8BE9-B75C-AAD9DE56CB59}"/>
+              </a:ext>
+            </a:extLst>
+          </p:cNvPr>
+          <p:cNvSpPr txBox="1"/>
+          <p:nvPr/>
+        </p:nvSpPr>
+        <p:spPr>
+          <a:xfrm>
+            <a:off x="840740" y="9548495"/>
+            <a:ext cx="7754620" cy="425917"/>
+          </a:xfrm>
+          <a:prstGeom prst="rect">
+            <a:avLst/>
+          </a:prstGeom>
+        </p:spPr>
+        <p:txBody>
+          <a:bodyPr lIns="0" tIns="0" rIns="0" bIns="0" rtlCol="0" anchor="t">
+            <a:spAutoFit/>
+          </a:bodyPr>
+          <a:lstStyle/>
+          <a:p>
+            <a:pPr algn="l">
+              <a:lnSpc>
+                <a:spcPts val="2520"/>
+              </a:lnSpc>
+            </a:pPr>
+            <a:r>
+              <a:rPr lang="en-US" sz="2100" spc="600">
+                <a:solidFill>
+                  <a:srgbClr val="B4B4B4"/>
+                </a:solidFill>
+                <a:latin typeface="Arimo"/>
+                <a:ea typeface="Arimo"/>
+                <a:cs typeface="Arimo"/>
+                <a:sym typeface="Arimo"/>
+              </a:rPr>
+              <a:t>www.viettel.com.vn</a:t>
+            </a:r>
+          </a:p>
+        </p:txBody>
+      </p:sp>
+      <p:sp>
+        <p:nvSpPr>
+          <p:cNvPr id="7" name="TextBox 7">
+            <a:extLst>
+              <a:ext uri="{FF2B5EF4-FFF2-40B4-BE49-F238E27FC236}">
+                <a16:creationId xmlns:a16="http://schemas.microsoft.com/office/drawing/2014/main" id="{C8D23D82-DAAB-6878-A7C2-565D480C9515}"/>
+              </a:ext>
+            </a:extLst>
+          </p:cNvPr>
+          <p:cNvSpPr txBox="1"/>
+          <p:nvPr/>
+        </p:nvSpPr>
+        <p:spPr>
+          <a:xfrm>
+            <a:off x="1024128" y="886968"/>
+            <a:ext cx="16248888" cy="1042416"/>
+          </a:xfrm>
+          <a:prstGeom prst="rect">
+            <a:avLst/>
+          </a:prstGeom>
+        </p:spPr>
+        <p:txBody>
+          <a:bodyPr lIns="0" tIns="0" rIns="0" bIns="0" rtlCol="0" anchor="t">
+            <a:spAutoFit/>
+          </a:bodyPr>
+          <a:lstStyle/>
+          <a:p>
+            <a:pPr algn="ctr">
+              <a:lnSpc>
+                <a:spcPts val="7880"/>
+              </a:lnSpc>
+            </a:pPr>
+            <a:r>
+              <a:rPr lang="en-US" sz="7577" dirty="0">
+                <a:solidFill>
+                  <a:srgbClr val="E80500"/>
+                </a:solidFill>
+                <a:latin typeface="Calistoga"/>
+                <a:ea typeface="Calistoga"/>
+                <a:cs typeface="Calistoga"/>
+                <a:sym typeface="Calistoga"/>
+              </a:rPr>
+              <a:t>Introduction</a:t>
+            </a:r>
+          </a:p>
+        </p:txBody>
+      </p:sp>
+      <p:sp>
+        <p:nvSpPr>
+          <p:cNvPr id="8" name="TextBox 8">
+            <a:extLst>
+              <a:ext uri="{FF2B5EF4-FFF2-40B4-BE49-F238E27FC236}">
+                <a16:creationId xmlns:a16="http://schemas.microsoft.com/office/drawing/2014/main" id="{01BC443D-1E74-B453-3031-62AA93E37FA9}"/>
+              </a:ext>
+            </a:extLst>
+          </p:cNvPr>
+          <p:cNvSpPr txBox="1"/>
+          <p:nvPr/>
+        </p:nvSpPr>
+        <p:spPr>
+          <a:xfrm>
+            <a:off x="1024128" y="2240280"/>
+            <a:ext cx="16248888" cy="2107308"/>
+          </a:xfrm>
+          <a:prstGeom prst="rect">
+            <a:avLst/>
+          </a:prstGeom>
+        </p:spPr>
+        <p:txBody>
+          <a:bodyPr lIns="0" tIns="0" rIns="0" bIns="0" rtlCol="0" anchor="t">
+            <a:spAutoFit/>
+          </a:bodyPr>
+          <a:lstStyle/>
+          <a:p>
+            <a:pPr marL="457200" indent="-457200" algn="l">
+              <a:lnSpc>
+                <a:spcPts val="4200"/>
+              </a:lnSpc>
+              <a:buFontTx/>
+              <a:buChar char="-"/>
+            </a:pPr>
+            <a:r>
+              <a:rPr lang="en-US" sz="3000" dirty="0">
+                <a:solidFill>
+                  <a:srgbClr val="000000"/>
+                </a:solidFill>
+                <a:latin typeface="Arimo"/>
+                <a:ea typeface="Arimo"/>
+                <a:cs typeface="Arimo"/>
+                <a:sym typeface="Arimo"/>
+              </a:rPr>
+              <a:t>TTS system: a program to synthesize speech from text</a:t>
+            </a:r>
+          </a:p>
+          <a:p>
+            <a:pPr marL="457200" indent="-457200" algn="l">
+              <a:lnSpc>
+                <a:spcPts val="4200"/>
+              </a:lnSpc>
+              <a:buFontTx/>
+              <a:buChar char="-"/>
+            </a:pPr>
+            <a:r>
+              <a:rPr lang="en-US" sz="3000" dirty="0">
+                <a:solidFill>
+                  <a:srgbClr val="000000"/>
+                </a:solidFill>
+                <a:latin typeface="Arimo"/>
+                <a:ea typeface="Arimo"/>
+                <a:cs typeface="Arimo"/>
+                <a:sym typeface="Arimo"/>
+              </a:rPr>
+              <a:t>Non-verbal elements in speech: sobbing, laughter, breathing …</a:t>
+            </a:r>
+          </a:p>
+          <a:p>
+            <a:pPr marL="457200" indent="-457200" algn="l">
+              <a:lnSpc>
+                <a:spcPts val="4200"/>
+              </a:lnSpc>
+              <a:buFont typeface="Wingdings" panose="05000000000000000000" pitchFamily="2" charset="2"/>
+              <a:buChar char="è"/>
+            </a:pPr>
+            <a:r>
+              <a:rPr lang="en-US" sz="3000" dirty="0">
+                <a:solidFill>
+                  <a:srgbClr val="000000"/>
+                </a:solidFill>
+                <a:latin typeface="Arimo"/>
+                <a:ea typeface="Arimo"/>
+                <a:cs typeface="Arimo"/>
+                <a:sym typeface="Arimo"/>
+              </a:rPr>
+              <a:t>Combine together </a:t>
+            </a:r>
+            <a:r>
+              <a:rPr lang="en-US" sz="3000" dirty="0" err="1">
+                <a:solidFill>
+                  <a:srgbClr val="000000"/>
+                </a:solidFill>
+                <a:latin typeface="Arimo"/>
+                <a:ea typeface="Arimo"/>
+                <a:cs typeface="Arimo"/>
+                <a:sym typeface="Arimo"/>
+              </a:rPr>
+              <a:t>ro</a:t>
+            </a:r>
+            <a:r>
+              <a:rPr lang="en-US" sz="3000" dirty="0">
+                <a:solidFill>
+                  <a:srgbClr val="000000"/>
+                </a:solidFill>
+                <a:latin typeface="Arimo"/>
+                <a:ea typeface="Arimo"/>
+                <a:cs typeface="Arimo"/>
+                <a:sym typeface="Arimo"/>
+              </a:rPr>
+              <a:t> create more realistic conversation</a:t>
+            </a:r>
+          </a:p>
+          <a:p>
+            <a:pPr algn="l">
+              <a:lnSpc>
+                <a:spcPts val="4200"/>
+              </a:lnSpc>
+            </a:pPr>
+            <a:endParaRPr lang="en-US" sz="3000" dirty="0">
+              <a:solidFill>
+                <a:srgbClr val="000000"/>
+              </a:solidFill>
+              <a:latin typeface="Arimo"/>
+              <a:ea typeface="Arimo"/>
+              <a:cs typeface="Arimo"/>
+              <a:sym typeface="Arimo"/>
+            </a:endParaRPr>
+          </a:p>
+        </p:txBody>
+      </p:sp>
+      <p:pic>
+        <p:nvPicPr>
+          <p:cNvPr id="10" name="Picture 9" descr="Germany's WDR Implements Text to Speech System for Disaster Messages -  Content + Technology">
+            <a:extLst>
+              <a:ext uri="{FF2B5EF4-FFF2-40B4-BE49-F238E27FC236}">
+                <a16:creationId xmlns:a16="http://schemas.microsoft.com/office/drawing/2014/main" id="{009CCD44-64F3-9237-66BF-50FE06231339}"/>
+              </a:ext>
+            </a:extLst>
+          </p:cNvPr>
+          <p:cNvPicPr>
+            <a:picLocks noChangeAspect="1"/>
+          </p:cNvPicPr>
+          <p:nvPr/>
+        </p:nvPicPr>
+        <p:blipFill>
+          <a:blip r:embed="rId5"/>
+          <a:stretch>
+            <a:fillRect/>
+          </a:stretch>
+        </p:blipFill>
+        <p:spPr>
+          <a:xfrm>
+            <a:off x="4876800" y="4093304"/>
+            <a:ext cx="8534399" cy="4800600"/>
+          </a:xfrm>
+          <a:prstGeom prst="rect">
+            <a:avLst/>
+          </a:prstGeom>
+        </p:spPr>
+      </p:pic>
+    </p:spTree>
+    <p:extLst>
+      <p:ext uri="{BB962C8B-B14F-4D97-AF65-F5344CB8AC3E}">
+        <p14:creationId xmlns:p14="http://schemas.microsoft.com/office/powerpoint/2010/main" val="21534927"/>
+      </p:ext>
+    </p:extLst>
   </p:cSld>
   <p:clrMapOvr>
     <a:masterClrMapping/>
@@ -8763,7 +11743,7 @@
         <p:spPr>
           <a:xfrm>
             <a:off x="1024128" y="2240280"/>
-            <a:ext cx="16248888" cy="1188720"/>
+            <a:ext cx="16248888" cy="2107308"/>
           </a:xfrm>
           <a:prstGeom prst="rect">
             <a:avLst/>
@@ -8790,35 +11770,71 @@
                 <a:cs typeface="Arimo"/>
                 <a:sym typeface="Arimo"/>
               </a:rPr>
-              <a:t>We synthesize tagged Vietnamese NVV speech, then fine-tune OmniVoice so an inline tag such as [laughter] produces that sound in the cloned voice.</a:t>
-            </a:r>
-          </a:p>
-        </p:txBody>
-      </p:sp>
-      <p:pic>
-        <p:nvPicPr>
-          <p:cNvPr id="9" name="Figure overview" descr="Overview: (a) training-data synthesis in six steps, (b) fine-tuning and inference"/>
-          <p:cNvPicPr>
-            <a:picLocks noChangeAspect="1"/>
-          </p:cNvPicPr>
-          <p:nvPr/>
-        </p:nvPicPr>
-        <p:blipFill>
-          <a:blip r:embed="rId5"/>
-          <a:stretch>
-            <a:fillRect/>
-          </a:stretch>
-        </p:blipFill>
-        <p:spPr>
-          <a:xfrm>
-            <a:off x="4906710" y="3611880"/>
-            <a:ext cx="8474579" cy="5440680"/>
-          </a:xfrm>
-          <a:prstGeom prst="rect">
-            <a:avLst/>
-          </a:prstGeom>
-        </p:spPr>
-      </p:pic>
+              <a:t>Challenge:</a:t>
+            </a:r>
+          </a:p>
+          <a:p>
+            <a:pPr marL="457200" indent="-457200" algn="l">
+              <a:lnSpc>
+                <a:spcPts val="4200"/>
+              </a:lnSpc>
+              <a:buFontTx/>
+              <a:buChar char="-"/>
+            </a:pPr>
+            <a:r>
+              <a:rPr lang="en-US" sz="3000" dirty="0">
+                <a:solidFill>
+                  <a:srgbClr val="000000"/>
+                </a:solidFill>
+                <a:latin typeface="Arimo"/>
+                <a:ea typeface="Arimo"/>
+                <a:cs typeface="Arimo"/>
+                <a:sym typeface="Arimo"/>
+              </a:rPr>
+              <a:t>Open source and commercial model fail frequently on Vietnamese</a:t>
+            </a:r>
+          </a:p>
+          <a:p>
+            <a:pPr marL="457200" indent="-457200" algn="l">
+              <a:lnSpc>
+                <a:spcPts val="4200"/>
+              </a:lnSpc>
+              <a:buFontTx/>
+              <a:buChar char="-"/>
+            </a:pPr>
+            <a:r>
+              <a:rPr lang="en-US" sz="3000" dirty="0">
+                <a:solidFill>
+                  <a:srgbClr val="000000"/>
+                </a:solidFill>
+                <a:latin typeface="Arimo"/>
+                <a:ea typeface="Arimo"/>
+                <a:cs typeface="Arimo"/>
+                <a:sym typeface="Arimo"/>
+              </a:rPr>
+              <a:t>No TTS + NVV dataset </a:t>
+            </a:r>
+          </a:p>
+          <a:p>
+            <a:pPr marL="457200" indent="-457200" algn="l">
+              <a:lnSpc>
+                <a:spcPts val="4200"/>
+              </a:lnSpc>
+              <a:buFontTx/>
+              <a:buChar char="-"/>
+            </a:pPr>
+            <a:endParaRPr lang="en-US" sz="3000" dirty="0">
+              <a:solidFill>
+                <a:srgbClr val="000000"/>
+              </a:solidFill>
+              <a:latin typeface="Arimo"/>
+              <a:ea typeface="Arimo"/>
+              <a:cs typeface="Arimo"/>
+              <a:sym typeface="Arimo"/>
+            </a:endParaRPr>
+          </a:p>
+        </p:txBody>
+      </p:sp>
     </p:spTree>
   </p:cSld>
   <p:clrMapOvr>
@@ -8830,14 +11846,6 @@
 <file path=ppt/slides/slide4.xml><?xml version="1.0" encoding="utf-8"?>
 <p:sld xmlns:a="http://schemas.openxmlformats.org/drawingml/2006/main" xmlns:r="http://schemas.openxmlformats.org/officeDocument/2006/relationships" xmlns:p="http://schemas.openxmlformats.org/presentationml/2006/main">
   <p:cSld>
-    <p:bg>
-      <p:bgPr>
-        <a:solidFill>
-          <a:srgbClr val="F04453"/>
-        </a:solidFill>
-        <a:effectLst/>
-      </p:bgPr>
-    </p:bg>
     <p:spTree>
       <p:nvGrpSpPr>
         <p:cNvPr id="1" name=""/>
@@ -8860,6 +11868,59 @@
         </p:nvSpPr>
         <p:spPr>
           <a:xfrm>
+            <a:off x="0" y="9206494"/>
+            <a:ext cx="18288000" cy="1080508"/>
+          </a:xfrm>
+          <a:custGeom>
+            <a:avLst/>
+            <a:gdLst/>
+            <a:ahLst/>
+            <a:cxnLst/>
+            <a:rect l="l" t="t" r="r" b="b"/>
+            <a:pathLst>
+              <a:path w="18288000" h="1080508">
+                <a:moveTo>
+                  <a:pt x="0" y="0"/>
+                </a:moveTo>
+                <a:lnTo>
+                  <a:pt x="18288000" y="0"/>
+                </a:lnTo>
+                <a:lnTo>
+                  <a:pt x="18288000" y="1080508"/>
+                </a:lnTo>
+                <a:lnTo>
+                  <a:pt x="0" y="1080508"/>
+                </a:lnTo>
+                <a:lnTo>
+                  <a:pt x="0" y="0"/>
+                </a:lnTo>
+                <a:close/>
+              </a:path>
+            </a:pathLst>
+          </a:custGeom>
+          <a:blipFill>
+            <a:blip r:embed="rId3"/>
+            <a:stretch>
+              <a:fillRect l="-130" r="-130"/>
+            </a:stretch>
+          </a:blipFill>
+        </p:spPr>
+        <p:txBody>
+          <a:bodyPr/>
+          <a:lstStyle/>
+          <a:p>
+            <a:endParaRPr lang="en-VN"/>
+          </a:p>
+        </p:txBody>
+      </p:sp>
+      <p:sp>
+        <p:nvSpPr>
+          <p:cNvPr id="3" name="Freeform 3"/>
+          <p:cNvSpPr/>
+          <p:nvPr/>
+        </p:nvSpPr>
+        <p:spPr>
+          <a:xfrm>
             <a:off x="15326350" y="9512300"/>
             <a:ext cx="1950428" cy="429520"/>
           </a:xfrm>
@@ -8891,7 +11952,7 @@
             </a:pathLst>
           </a:custGeom>
           <a:blipFill>
-            <a:blip r:embed="rId3"/>
+            <a:blip r:embed="rId4"/>
             <a:stretch>
               <a:fillRect t="-240" b="-240"/>
             </a:stretch>
@@ -8907,7 +11968,7 @@
       </p:sp>
       <p:sp>
         <p:nvSpPr>
-          <p:cNvPr id="3" name="Freeform 3"/>
+          <p:cNvPr id="4" name="Freeform 4"/>
           <p:cNvSpPr/>
           <p:nvPr/>
         </p:nvSpPr>
@@ -8944,7 +12005,7 @@
             </a:pathLst>
           </a:custGeom>
           <a:blipFill>
-            <a:blip r:embed="rId3"/>
+            <a:blip r:embed="rId4"/>
             <a:stretch>
               <a:fillRect t="-240" b="-240"/>
             </a:stretch>
@@ -8960,7 +12021,7 @@
       </p:sp>
       <p:sp>
         <p:nvSpPr>
-          <p:cNvPr id="4" name="TextBox 4"/>
+          <p:cNvPr id="5" name="TextBox 5"/>
           <p:cNvSpPr txBox="1"/>
           <p:nvPr/>
         </p:nvSpPr>
@@ -9001,14 +12062,14 @@
       </p:sp>
       <p:sp>
         <p:nvSpPr>
-          <p:cNvPr id="5" name="TextBox 5"/>
+          <p:cNvPr id="6" name="TextBox 6"/>
           <p:cNvSpPr txBox="1"/>
           <p:nvPr/>
         </p:nvSpPr>
         <p:spPr>
           <a:xfrm>
-            <a:off x="1016858" y="4122746"/>
-            <a:ext cx="16242442" cy="1230630"/>
+            <a:off x="840740" y="9548495"/>
+            <a:ext cx="7754620" cy="425917"/>
           </a:xfrm>
           <a:prstGeom prst="rect">
             <a:avLst/>
@@ -9020,26 +12081,132 @@
           </a:bodyPr>
           <a:lstStyle/>
           <a:p>
+            <a:pPr algn="l">
+              <a:lnSpc>
+                <a:spcPts val="2520"/>
+              </a:lnSpc>
+            </a:pPr>
+            <a:r>
+              <a:rPr lang="en-US" sz="2100" spc="600">
+                <a:solidFill>
+                  <a:srgbClr val="B4B4B4"/>
+                </a:solidFill>
+                <a:latin typeface="Arimo"/>
+                <a:ea typeface="Arimo"/>
+                <a:cs typeface="Arimo"/>
+                <a:sym typeface="Arimo"/>
+              </a:rPr>
+              <a:t>www.viettel.com.vn</a:t>
+            </a:r>
+          </a:p>
+        </p:txBody>
+      </p:sp>
+      <p:sp>
+        <p:nvSpPr>
+          <p:cNvPr id="7" name="TextBox 7"/>
+          <p:cNvSpPr txBox="1"/>
+          <p:nvPr/>
+        </p:nvSpPr>
+        <p:spPr>
+          <a:xfrm>
+            <a:off x="1024128" y="886968"/>
+            <a:ext cx="16248888" cy="1042416"/>
+          </a:xfrm>
+          <a:prstGeom prst="rect">
+            <a:avLst/>
+          </a:prstGeom>
+        </p:spPr>
+        <p:txBody>
+          <a:bodyPr lIns="0" tIns="0" rIns="0" bIns="0" rtlCol="0" anchor="t">
+            <a:spAutoFit/>
+          </a:bodyPr>
+          <a:lstStyle/>
+          <a:p>
             <a:pPr algn="ctr">
               <a:lnSpc>
-                <a:spcPts val="8320"/>
+                <a:spcPts val="7880"/>
               </a:lnSpc>
             </a:pPr>
             <a:r>
-              <a:rPr lang="en-US" sz="8000" dirty="0">
-                <a:solidFill>
-                  <a:srgbClr val="FFFFFF"/>
+              <a:rPr lang="en-US" sz="7577" dirty="0">
+                <a:solidFill>
+                  <a:srgbClr val="E80500"/>
                 </a:solidFill>
                 <a:latin typeface="Calistoga"/>
                 <a:ea typeface="Calistoga"/>
                 <a:cs typeface="Calistoga"/>
                 <a:sym typeface="Calistoga"/>
               </a:rPr>
-              <a:t>Training-data synthesis</a:t>
-            </a:r>
-          </a:p>
-        </p:txBody>
-      </p:sp>
+              <a:t>Method</a:t>
+            </a:r>
+          </a:p>
+        </p:txBody>
+      </p:sp>
+      <p:sp>
+        <p:nvSpPr>
+          <p:cNvPr id="8" name="TextBox 8"/>
+          <p:cNvSpPr txBox="1"/>
+          <p:nvPr/>
+        </p:nvSpPr>
+        <p:spPr>
+          <a:xfrm>
+            <a:off x="1024128" y="2240280"/>
+            <a:ext cx="16248888" cy="1188720"/>
+          </a:xfrm>
+          <a:prstGeom prst="rect">
+            <a:avLst/>
+          </a:prstGeom>
+        </p:spPr>
+        <p:txBody>
+          <a:bodyPr lIns="0" tIns="0" rIns="0" bIns="0" rtlCol="0" anchor="t">
+            <a:spAutoFit/>
+          </a:bodyPr>
+          <a:lstStyle/>
+          <a:p>
+            <a:pPr algn="l">
+              <a:lnSpc>
+                <a:spcPts val="4200"/>
+              </a:lnSpc>
+            </a:pPr>
+            <a:r>
+              <a:rPr lang="en-US" sz="3000" dirty="0">
+                <a:solidFill>
+                  <a:srgbClr val="000000"/>
+                </a:solidFill>
+                <a:latin typeface="Arimo"/>
+                <a:ea typeface="Arimo"/>
+                <a:cs typeface="Arimo"/>
+                <a:sym typeface="Arimo"/>
+              </a:rPr>
+              <a:t>We synthesize tagged Vietnamese NVV speech, then fine-tune OmniVoice so an inline tag such as [laughter] produces that sound in the cloned voice.</a:t>
+            </a:r>
+          </a:p>
+        </p:txBody>
+      </p:sp>
+      <p:pic>
+        <p:nvPicPr>
+          <p:cNvPr id="9" name="Figure overview" descr="Overview: (a) training-data synthesis in six steps, (b) fine-tuning and inference"/>
+          <p:cNvPicPr>
+            <a:picLocks noChangeAspect="1"/>
+          </p:cNvPicPr>
+          <p:nvPr/>
+        </p:nvPicPr>
+        <p:blipFill>
+          <a:blip r:embed="rId5"/>
+          <a:stretch>
+            <a:fillRect/>
+          </a:stretch>
+        </p:blipFill>
+        <p:spPr>
+          <a:xfrm>
+            <a:off x="4906710" y="3611880"/>
+            <a:ext cx="8474579" cy="5440680"/>
+          </a:xfrm>
+          <a:prstGeom prst="rect">
+            <a:avLst/>
+          </a:prstGeom>
+        </p:spPr>
+      </p:pic>
     </p:spTree>
   </p:cSld>
   <p:clrMapOvr>
@@ -11418,7 +14585,7 @@
         <p:spPr>
           <a:xfrm>
             <a:off x="1024128" y="2240280"/>
-            <a:ext cx="16248888" cy="1188720"/>
+            <a:ext cx="16248888" cy="1568699"/>
           </a:xfrm>
           <a:prstGeom prst="rect">
             <a:avLst/>
@@ -11446,6 +14613,25 @@
                 <a:sym typeface="Arimo"/>
               </a:rPr>
               <a:t>Qwen3-Omni listens to the recording and picks one slot and the NVV tag that best fits what the speaker is doing there.</a:t>
+            </a:r>
+          </a:p>
+          <a:p>
+            <a:pPr algn="l">
+              <a:lnSpc>
+                <a:spcPts val="4200"/>
+              </a:lnSpc>
+            </a:pPr>
+            <a:r>
+              <a:rPr lang="en-US" sz="3000" dirty="0">
+                <a:solidFill>
+                  <a:srgbClr val="000000"/>
+                </a:solidFill>
+                <a:latin typeface="Arimo"/>
+                <a:ea typeface="Arimo"/>
+                <a:cs typeface="Arimo"/>
+                <a:sym typeface="Arimo"/>
+              </a:rPr>
+              <a:t>* Qwen3-Omni: LLM model with capacity to tokenize and understand audio</a:t>
             </a:r>
           </a:p>
         </p:txBody>
@@ -11466,8 +14652,8 @@
         </p:blipFill>
         <p:spPr>
           <a:xfrm>
-            <a:off x="3901779" y="3657600"/>
-            <a:ext cx="10484443" cy="4206240"/>
+            <a:off x="4579789" y="4384500"/>
+            <a:ext cx="9128422" cy="3662220"/>
           </a:xfrm>
           <a:prstGeom prst="rect">
             <a:avLst/>
@@ -12792,7 +15978,7 @@
         <p:spPr>
           <a:xfrm>
             <a:off x="1024128" y="2240280"/>
-            <a:ext cx="16248888" cy="1188720"/>
+            <a:ext cx="16248888" cy="1568699"/>
           </a:xfrm>
           <a:prstGeom prst="rect">
             <a:avLst/>
@@ -12820,6 +16006,73 @@
                 <a:sym typeface="Arimo"/>
               </a:rPr>
               <a:t>Seed-VC converts the selected clip into the host speaker's voice, using the host utterance as the reference.</a:t>
+            </a:r>
+          </a:p>
+          <a:p>
+            <a:pPr algn="l">
+              <a:lnSpc>
+                <a:spcPct val="100000"/>
+              </a:lnSpc>
+            </a:pPr>
+            <a:r>
+              <a:rPr lang="en-US" sz="3000" dirty="0">
+                <a:solidFill>
+                  <a:srgbClr val="000000"/>
+                </a:solidFill>
+                <a:latin typeface="Arimo"/>
+                <a:ea typeface="Arimo"/>
+                <a:cs typeface="Arimo"/>
+                <a:sym typeface="Arimo"/>
+              </a:rPr>
+              <a:t>* Voice conversion system copy original </a:t>
+            </a:r>
+            <a:r>
+              <a:rPr lang="en-US" sz="3000" b="1" dirty="0">
+                <a:solidFill>
+                  <a:srgbClr val="000000"/>
+                </a:solidFill>
+                <a:latin typeface="Arimo"/>
+                <a:ea typeface="Arimo"/>
+                <a:cs typeface="Arimo"/>
+                <a:sym typeface="Arimo"/>
+              </a:rPr>
+              <a:t>prosody</a:t>
+            </a:r>
+            <a:r>
+              <a:rPr lang="en-US" sz="3000" dirty="0">
+                <a:solidFill>
+                  <a:srgbClr val="000000"/>
+                </a:solidFill>
+                <a:latin typeface="Arimo"/>
+                <a:ea typeface="Arimo"/>
+                <a:cs typeface="Arimo"/>
+                <a:sym typeface="Arimo"/>
+              </a:rPr>
+              <a:t> while changing </a:t>
+            </a:r>
+            <a:r>
+              <a:rPr lang="en-US" sz="3000" b="1" dirty="0">
+                <a:solidFill>
+                  <a:srgbClr val="000000"/>
+                </a:solidFill>
+                <a:latin typeface="Arimo"/>
+                <a:ea typeface="Arimo"/>
+                <a:cs typeface="Arimo"/>
+                <a:sym typeface="Arimo"/>
+              </a:rPr>
+              <a:t>timbre</a:t>
+            </a:r>
+            <a:r>
+              <a:rPr lang="en-US" sz="3000" dirty="0">
+                <a:solidFill>
+                  <a:srgbClr val="000000"/>
+                </a:solidFill>
+                <a:latin typeface="Arimo"/>
+                <a:ea typeface="Arimo"/>
+                <a:cs typeface="Arimo"/>
+                <a:sym typeface="Arimo"/>
+              </a:rPr>
+              <a:t> to prompted speaker</a:t>
             </a:r>
           </a:p>
         </p:txBody>
@@ -12840,8 +16093,8 @@
         </p:blipFill>
         <p:spPr>
           <a:xfrm>
-            <a:off x="3501690" y="3657600"/>
-            <a:ext cx="11284620" cy="4206240"/>
+            <a:off x="4718050" y="4592417"/>
+            <a:ext cx="8865570" cy="3304561"/>
           </a:xfrm>
           <a:prstGeom prst="rect">
             <a:avLst/>
